--- a/Lectures/10-model-selection-and-validation-part-1.pptx
+++ b/Lectures/10-model-selection-and-validation-part-1.pptx
@@ -5,41 +5,40 @@
     <p:sldMasterId id="2147483648" r:id="rId1"/>
   </p:sldMasterIdLst>
   <p:notesMasterIdLst>
-    <p:notesMasterId r:id="rId29"/>
+    <p:notesMasterId r:id="rId28"/>
   </p:notesMasterIdLst>
   <p:sldIdLst>
     <p:sldId id="256" r:id="rId2"/>
-    <p:sldId id="491" r:id="rId3"/>
-    <p:sldId id="494" r:id="rId4"/>
-    <p:sldId id="471" r:id="rId5"/>
-    <p:sldId id="318" r:id="rId6"/>
-    <p:sldId id="323" r:id="rId7"/>
-    <p:sldId id="286" r:id="rId8"/>
-    <p:sldId id="472" r:id="rId9"/>
-    <p:sldId id="287" r:id="rId10"/>
-    <p:sldId id="478" r:id="rId11"/>
-    <p:sldId id="468" r:id="rId12"/>
-    <p:sldId id="492" r:id="rId13"/>
-    <p:sldId id="495" r:id="rId14"/>
-    <p:sldId id="475" r:id="rId15"/>
-    <p:sldId id="453" r:id="rId16"/>
-    <p:sldId id="352" r:id="rId17"/>
-    <p:sldId id="458" r:id="rId18"/>
-    <p:sldId id="484" r:id="rId19"/>
-    <p:sldId id="457" r:id="rId20"/>
-    <p:sldId id="428" r:id="rId21"/>
-    <p:sldId id="455" r:id="rId22"/>
-    <p:sldId id="429" r:id="rId23"/>
-    <p:sldId id="430" r:id="rId24"/>
-    <p:sldId id="460" r:id="rId25"/>
-    <p:sldId id="486" r:id="rId26"/>
-    <p:sldId id="483" r:id="rId27"/>
-    <p:sldId id="496" r:id="rId28"/>
+    <p:sldId id="471" r:id="rId3"/>
+    <p:sldId id="318" r:id="rId4"/>
+    <p:sldId id="323" r:id="rId5"/>
+    <p:sldId id="286" r:id="rId6"/>
+    <p:sldId id="497" r:id="rId7"/>
+    <p:sldId id="287" r:id="rId8"/>
+    <p:sldId id="478" r:id="rId9"/>
+    <p:sldId id="468" r:id="rId10"/>
+    <p:sldId id="498" r:id="rId11"/>
+    <p:sldId id="492" r:id="rId12"/>
+    <p:sldId id="475" r:id="rId13"/>
+    <p:sldId id="453" r:id="rId14"/>
+    <p:sldId id="352" r:id="rId15"/>
+    <p:sldId id="458" r:id="rId16"/>
+    <p:sldId id="484" r:id="rId17"/>
+    <p:sldId id="457" r:id="rId18"/>
+    <p:sldId id="428" r:id="rId19"/>
+    <p:sldId id="455" r:id="rId20"/>
+    <p:sldId id="429" r:id="rId21"/>
+    <p:sldId id="430" r:id="rId22"/>
+    <p:sldId id="460" r:id="rId23"/>
+    <p:sldId id="486" r:id="rId24"/>
+    <p:sldId id="500" r:id="rId25"/>
+    <p:sldId id="483" r:id="rId26"/>
+    <p:sldId id="499" r:id="rId27"/>
   </p:sldIdLst>
   <p:sldSz cx="12192000" cy="6858000"/>
   <p:notesSz cx="6858000" cy="9144000"/>
   <p:custDataLst>
-    <p:tags r:id="rId30"/>
+    <p:tags r:id="rId29"/>
   </p:custDataLst>
   <p:defaultTextStyle>
     <a:defPPr marR="0" lvl="0" algn="l" rtl="0">
@@ -275,14 +274,14 @@
       <p15:sldGuideLst xmlns:p15="http://schemas.microsoft.com/office/powerpoint/2012/main"/>
     </p:ext>
     <p:ext uri="http://customooxmlschemas.google.com/">
-      <go:slidesCustomData xmlns="" xmlns:mc="http://schemas.openxmlformats.org/markup-compatibility/2006" xmlns:mv="urn:schemas-microsoft-com:mac:vml" xmlns:c="http://schemas.openxmlformats.org/drawingml/2006/chart" xmlns:dgm="http://schemas.openxmlformats.org/drawingml/2006/diagram" xmlns:o="urn:schemas-microsoft-com:office:office" xmlns:v="urn:schemas-microsoft-com:vml" xmlns:pvml="urn:schemas-microsoft-com:office:powerpoint" xmlns:com="http://schemas.openxmlformats.org/drawingml/2006/compatibility" xmlns:p14="http://schemas.microsoft.com/office/powerpoint/2010/main" xmlns:p15="http://schemas.microsoft.com/office/powerpoint/2012/main" xmlns:go="http://customooxmlschemas.google.com/" r:id="rId40" roundtripDataSignature="AMtx7mjFyVUGRZWio+dc9dxzYsimUxNJbg=="/>
+      <go:slidesCustomData xmlns:go="http://customooxmlschemas.google.com/" xmlns:p15="http://schemas.microsoft.com/office/powerpoint/2012/main" xmlns:p14="http://schemas.microsoft.com/office/powerpoint/2010/main" xmlns:com="http://schemas.openxmlformats.org/drawingml/2006/compatibility" xmlns:pvml="urn:schemas-microsoft-com:office:powerpoint" xmlns:v="urn:schemas-microsoft-com:vml" xmlns:o="urn:schemas-microsoft-com:office:office" xmlns:dgm="http://schemas.openxmlformats.org/drawingml/2006/diagram" xmlns:c="http://schemas.openxmlformats.org/drawingml/2006/chart" xmlns:mv="urn:schemas-microsoft-com:mac:vml" xmlns:mc="http://schemas.openxmlformats.org/markup-compatibility/2006" xmlns="" r:id="rId40" roundtripDataSignature="AMtx7mjFyVUGRZWio+dc9dxzYsimUxNJbg=="/>
     </p:ext>
   </p:extLst>
 </p:presentation>
 </file>
 
 <file path=ppt/diagrams/colors1.xml><?xml version="1.0" encoding="utf-8"?>
-<dgm:colorsDef xmlns:dgm="http://schemas.openxmlformats.org/drawingml/2006/diagram" xmlns:a="http://schemas.openxmlformats.org/drawingml/2006/main" uniqueId="urn:microsoft.com/office/officeart/2005/8/colors/colorful1">
+<dgm:colorsDef xmlns:dgm="http://schemas.openxmlformats.org/drawingml/2006/diagram" xmlns:a="http://schemas.openxmlformats.org/drawingml/2006/main" uniqueId="urn:microsoft.com/office/officeart/2005/8/colors/colorful1#6">
   <dgm:title val=""/>
   <dgm:desc val=""/>
   <dgm:catLst>
@@ -1204,7 +1203,7 @@
 <dgm:dataModel xmlns:dgm="http://schemas.openxmlformats.org/drawingml/2006/diagram" xmlns:a="http://schemas.openxmlformats.org/drawingml/2006/main">
   <dgm:ptLst>
     <dgm:pt modelId="{E9FB0F4E-6967-3B44-A32F-E8B1C7AE98D5}" type="doc">
-      <dgm:prSet loTypeId="urn:microsoft.com/office/officeart/2005/8/layout/process5" loCatId="" qsTypeId="urn:microsoft.com/office/officeart/2005/8/quickstyle/simple1" qsCatId="simple" csTypeId="urn:microsoft.com/office/officeart/2005/8/colors/colorful1" csCatId="colorful" phldr="1"/>
+      <dgm:prSet loTypeId="urn:microsoft.com/office/officeart/2005/8/layout/process5" loCatId="" qsTypeId="urn:microsoft.com/office/officeart/2005/8/quickstyle/simple1#6" qsCatId="simple" csTypeId="urn:microsoft.com/office/officeart/2005/8/colors/colorful1#6" csCatId="colorful" phldr="1"/>
       <dgm:spPr/>
       <dgm:t>
         <a:bodyPr/>
@@ -4253,7 +4252,7 @@
 </file>
 
 <file path=ppt/diagrams/quickStyle1.xml><?xml version="1.0" encoding="utf-8"?>
-<dgm:styleDef xmlns:dgm="http://schemas.openxmlformats.org/drawingml/2006/diagram" xmlns:a="http://schemas.openxmlformats.org/drawingml/2006/main" uniqueId="urn:microsoft.com/office/officeart/2005/8/quickstyle/simple1">
+<dgm:styleDef xmlns:dgm="http://schemas.openxmlformats.org/drawingml/2006/diagram" xmlns:a="http://schemas.openxmlformats.org/drawingml/2006/main" uniqueId="urn:microsoft.com/office/officeart/2005/8/quickstyle/simple1#6">
   <dgm:title val=""/>
   <dgm:desc val=""/>
   <dgm:catLst>
@@ -8169,11 +8168,11 @@
 </file>
 
 <file path=ppt/slideLayouts/slideLayout5.xml><?xml version="1.0" encoding="utf-8"?>
-<p:sldLayout xmlns:a="http://schemas.openxmlformats.org/drawingml/2006/main" xmlns:r="http://schemas.openxmlformats.org/officeDocument/2006/relationships" xmlns:p="http://schemas.openxmlformats.org/presentationml/2006/main" matchingName="Blank" type="blank">
-  <p:cSld name="BLANK">
+<p:sldLayout xmlns:a="http://schemas.openxmlformats.org/drawingml/2006/main" xmlns:r="http://schemas.openxmlformats.org/officeDocument/2006/relationships" xmlns:p="http://schemas.openxmlformats.org/presentationml/2006/main" type="blank" preserve="1">
+  <p:cSld name="Blank">
     <p:spTree>
       <p:nvGrpSpPr>
-        <p:cNvPr id="1" name="Shape 55"/>
+        <p:cNvPr id="1" name=""/>
         <p:cNvGrpSpPr/>
         <p:nvPr/>
       </p:nvGrpSpPr>
@@ -8187,65 +8186,24 @@
       </p:grpSpPr>
       <p:sp>
         <p:nvSpPr>
-          <p:cNvPr id="56" name="Google Shape;56;g6dad9273e7_0_46"/>
-          <p:cNvSpPr txBox="1">
+          <p:cNvPr id="2" name="Slide Number Placeholder 1">
+            <a:extLst>
+              <a:ext uri="{FF2B5EF4-FFF2-40B4-BE49-F238E27FC236}">
+                <a16:creationId xmlns:a16="http://schemas.microsoft.com/office/drawing/2014/main" id="{943600F3-5447-ADE7-964B-5A65DE0AA44C}"/>
+              </a:ext>
+            </a:extLst>
+          </p:cNvPr>
+          <p:cNvSpPr>
             <a:spLocks noGrp="1"/>
           </p:cNvSpPr>
           <p:nvPr>
-            <p:ph type="sldNum" idx="12"/>
+            <p:ph type="sldNum" idx="10"/>
           </p:nvPr>
         </p:nvSpPr>
-        <p:spPr>
-          <a:xfrm>
-            <a:off x="11296610" y="6217622"/>
-            <a:ext cx="731700" cy="524700"/>
-          </a:xfrm>
-          <a:prstGeom prst="rect">
-            <a:avLst/>
-          </a:prstGeom>
-        </p:spPr>
+        <p:spPr/>
         <p:txBody>
-          <a:bodyPr spcFirstLastPara="1" wrap="square" lIns="121900" tIns="121900" rIns="121900" bIns="121900" anchor="ctr" anchorCtr="0">
-            <a:noAutofit/>
-          </a:bodyPr>
-          <a:lstStyle>
-            <a:lvl1pPr lvl="0">
-              <a:buNone/>
-              <a:defRPr/>
-            </a:lvl1pPr>
-            <a:lvl2pPr lvl="1">
-              <a:buNone/>
-              <a:defRPr/>
-            </a:lvl2pPr>
-            <a:lvl3pPr lvl="2">
-              <a:buNone/>
-              <a:defRPr/>
-            </a:lvl3pPr>
-            <a:lvl4pPr lvl="3">
-              <a:buNone/>
-              <a:defRPr/>
-            </a:lvl4pPr>
-            <a:lvl5pPr lvl="4">
-              <a:buNone/>
-              <a:defRPr/>
-            </a:lvl5pPr>
-            <a:lvl6pPr lvl="5">
-              <a:buNone/>
-              <a:defRPr/>
-            </a:lvl6pPr>
-            <a:lvl7pPr lvl="6">
-              <a:buNone/>
-              <a:defRPr/>
-            </a:lvl7pPr>
-            <a:lvl8pPr lvl="7">
-              <a:buNone/>
-              <a:defRPr/>
-            </a:lvl8pPr>
-            <a:lvl9pPr lvl="8">
-              <a:buNone/>
-              <a:defRPr/>
-            </a:lvl9pPr>
-          </a:lstStyle>
+          <a:bodyPr/>
+          <a:lstStyle/>
           <a:p>
             <a:pPr marL="0" lvl="0" indent="0" algn="r" rtl="0">
               <a:spcBef>
@@ -8257,14 +8215,19 @@
               <a:buNone/>
             </a:pPr>
             <a:fld id="{00000000-1234-1234-1234-123412341234}" type="slidenum">
-              <a:rPr lang="en-US"/>
+              <a:rPr lang="en-US" smtClean="0"/>
               <a:t>‹#›</a:t>
             </a:fld>
-            <a:endParaRPr/>
+            <a:endParaRPr lang="en-US"/>
           </a:p>
         </p:txBody>
       </p:sp>
     </p:spTree>
+    <p:extLst>
+      <p:ext uri="{BB962C8B-B14F-4D97-AF65-F5344CB8AC3E}">
+        <p14:creationId xmlns:p14="http://schemas.microsoft.com/office/powerpoint/2010/main" val="134928383"/>
+      </p:ext>
+    </p:extLst>
   </p:cSld>
   <p:clrMapOvr>
     <a:masterClrMapping/>
@@ -8843,7 +8806,7 @@
     <p:sldLayoutId id="2147483650" r:id="rId2"/>
     <p:sldLayoutId id="2147483651" r:id="rId3"/>
     <p:sldLayoutId id="2147483652" r:id="rId4"/>
-    <p:sldLayoutId id="2147483659" r:id="rId5"/>
+    <p:sldLayoutId id="2147483653" r:id="rId5"/>
   </p:sldLayoutIdLst>
   <p:hf sldNum="0" hdr="0" ftr="0" dt="0"/>
   <p:txStyles>
@@ -9761,8 +9724,16 @@
 </file>
 
 <file path=ppt/slides/slide10.xml><?xml version="1.0" encoding="utf-8"?>
-<p:sld xmlns:a="http://schemas.openxmlformats.org/drawingml/2006/main" xmlns:r="http://schemas.openxmlformats.org/officeDocument/2006/relationships" xmlns:p="http://schemas.openxmlformats.org/presentationml/2006/main">
+<p:sld xmlns:a="http://schemas.openxmlformats.org/drawingml/2006/main" xmlns:r="http://schemas.openxmlformats.org/officeDocument/2006/relationships" xmlns:p="http://schemas.openxmlformats.org/presentationml/2006/main" showMasterSp="0">
   <p:cSld>
+    <p:bg>
+      <p:bgPr>
+        <a:solidFill>
+          <a:srgbClr val="1A1A1A"/>
+        </a:solidFill>
+        <a:effectLst/>
+      </p:bgPr>
+    </p:bg>
     <p:spTree>
       <p:nvGrpSpPr>
         <p:cNvPr id="1" name=""/>
@@ -9779,211 +9750,529 @@
       </p:grpSpPr>
       <p:sp>
         <p:nvSpPr>
-          <p:cNvPr id="4" name="Title 3">
+          <p:cNvPr id="2" name="Rectangle 1">
             <a:extLst>
               <a:ext uri="{FF2B5EF4-FFF2-40B4-BE49-F238E27FC236}">
-                <a16:creationId xmlns:a16="http://schemas.microsoft.com/office/drawing/2014/main" id="{30C2C959-72F2-EF4D-80DA-F48A29D0F3C4}"/>
+                <a16:creationId xmlns:a16="http://schemas.microsoft.com/office/drawing/2014/main" id="{BD98A550-0C11-E9E7-7840-275C48E4C84A}"/>
               </a:ext>
             </a:extLst>
           </p:cNvPr>
-          <p:cNvSpPr>
-            <a:spLocks noGrp="1"/>
-          </p:cNvSpPr>
+          <p:cNvSpPr/>
           <p:nvPr>
-            <p:ph type="title"/>
+            <p:custDataLst>
+              <p:tags r:id="rId2"/>
+            </p:custDataLst>
           </p:nvPr>
         </p:nvSpPr>
-        <p:spPr/>
+        <p:spPr>
+          <a:xfrm>
+            <a:off x="444693" y="1742703"/>
+            <a:ext cx="2371696" cy="2371696"/>
+          </a:xfrm>
+          <a:prstGeom prst="rect">
+            <a:avLst/>
+          </a:prstGeom>
+          <a:blipFill>
+            <a:blip>
+              <a:extLst>
+                <a:ext uri="{96DAC541-7B7A-43D3-8B79-37D633B846F1}">
+                  <asvg:svgBlip xmlns:asvg="http://schemas.microsoft.com/office/drawing/2016/SVG/main" r:embed="rId7"/>
+                </a:ext>
+              </a:extLst>
+            </a:blip>
+            <a:stretch>
+              <a:fillRect/>
+            </a:stretch>
+          </a:blipFill>
+          <a:ln w="25400" cap="flat" cmpd="sng" algn="ctr">
+            <a:noFill/>
+            <a:prstDash val="solid"/>
+          </a:ln>
+          <a:effectLst/>
+          <a:extLst>
+            <a:ext uri="{91240B29-F687-4F45-9708-019B960494DF}">
+              <a14:hiddenLine xmlns:a14="http://schemas.microsoft.com/office/drawing/2010/main" w="25400" cap="flat" cmpd="sng" algn="ctr">
+                <a:solidFill>
+                  <a:srgbClr val="FFFFFF"/>
+                </a:solidFill>
+                <a:prstDash val="solid"/>
+              </a14:hiddenLine>
+            </a:ext>
+          </a:extLst>
+        </p:spPr>
+        <p:style>
+          <a:lnRef idx="2">
+            <a:schemeClr val="accent1">
+              <a:shade val="15000"/>
+            </a:schemeClr>
+          </a:lnRef>
+          <a:fillRef idx="1">
+            <a:schemeClr val="accent1"/>
+          </a:fillRef>
+          <a:effectRef idx="0">
+            <a:schemeClr val="accent1"/>
+          </a:effectRef>
+          <a:fontRef idx="minor">
+            <a:schemeClr val="lt1"/>
+          </a:fontRef>
+        </p:style>
         <p:txBody>
-          <a:bodyPr/>
+          <a:bodyPr rtlCol="0" anchor="ctr"/>
+          <a:lstStyle/>
+          <a:p>
+            <a:pPr algn="ctr"/>
+            <a:endParaRPr lang="en-US"/>
+          </a:p>
+        </p:txBody>
+      </p:sp>
+      <p:sp>
+        <p:nvSpPr>
+          <p:cNvPr id="3" name="Rectangle 2">
+            <a:extLst>
+              <a:ext uri="{FF2B5EF4-FFF2-40B4-BE49-F238E27FC236}">
+                <a16:creationId xmlns:a16="http://schemas.microsoft.com/office/drawing/2014/main" id="{854F14E4-5F06-193D-FBAA-60B945755621}"/>
+              </a:ext>
+            </a:extLst>
+          </p:cNvPr>
+          <p:cNvSpPr/>
+          <p:nvPr>
+            <p:custDataLst>
+              <p:tags r:id="rId3"/>
+            </p:custDataLst>
+          </p:nvPr>
+        </p:nvSpPr>
+        <p:spPr>
+          <a:xfrm>
+            <a:off x="3112851" y="1000897"/>
+            <a:ext cx="8486226" cy="3855308"/>
+          </a:xfrm>
+          <a:prstGeom prst="rect">
+            <a:avLst/>
+          </a:prstGeom>
+          <a:noFill/>
+          <a:ln w="25400" cap="flat" cmpd="sng" algn="ctr">
+            <a:noFill/>
+            <a:prstDash val="solid"/>
+          </a:ln>
+          <a:effectLst/>
+          <a:extLst>
+            <a:ext uri="{909E8E84-426E-40DD-AFC4-6F175D3DCCD1}">
+              <a14:hiddenFill xmlns:a14="http://schemas.microsoft.com/office/drawing/2010/main">
+                <a:solidFill>
+                  <a:schemeClr val="accent1"/>
+                </a:solidFill>
+              </a14:hiddenFill>
+            </a:ext>
+            <a:ext uri="{91240B29-F687-4F45-9708-019B960494DF}">
+              <a14:hiddenLine xmlns:a14="http://schemas.microsoft.com/office/drawing/2010/main" w="25400" cap="flat" cmpd="sng" algn="ctr">
+                <a:solidFill>
+                  <a:srgbClr val="FFFFFF"/>
+                </a:solidFill>
+                <a:prstDash val="solid"/>
+              </a14:hiddenLine>
+            </a:ext>
+          </a:extLst>
+        </p:spPr>
+        <p:style>
+          <a:lnRef idx="2">
+            <a:schemeClr val="accent1">
+              <a:shade val="15000"/>
+            </a:schemeClr>
+          </a:lnRef>
+          <a:fillRef idx="1">
+            <a:schemeClr val="accent1"/>
+          </a:fillRef>
+          <a:effectRef idx="0">
+            <a:schemeClr val="accent1"/>
+          </a:effectRef>
+          <a:fontRef idx="minor">
+            <a:schemeClr val="lt1"/>
+          </a:fontRef>
+        </p:style>
+        <p:txBody>
+          <a:bodyPr rtlCol="0" anchor="ctr"/>
           <a:lstStyle/>
           <a:p>
             <a:r>
-              <a:rPr lang="en-US" dirty="0"/>
-              <a:t>What do we need our selected model to do?</a:t>
+              <a:rPr lang="en-US" sz="2400" b="1">
+                <a:solidFill>
+                  <a:srgbClr val="FFFFFF"/>
+                </a:solidFill>
+              </a:rPr>
+              <a:t>You're working for a non-profit and a vendor is trying to sell you a donation propensity model that is validated to have 98% accuracy. Is this model good enough for your organization to purchase?</a:t>
             </a:r>
           </a:p>
         </p:txBody>
       </p:sp>
       <p:sp>
         <p:nvSpPr>
-          <p:cNvPr id="3" name="Text Placeholder 2">
+          <p:cNvPr id="4" name="Rectangle 3">
             <a:extLst>
               <a:ext uri="{FF2B5EF4-FFF2-40B4-BE49-F238E27FC236}">
-                <a16:creationId xmlns:a16="http://schemas.microsoft.com/office/drawing/2014/main" id="{DA13BAFF-48B6-9046-94F3-CBF50B2F21D8}"/>
+                <a16:creationId xmlns:a16="http://schemas.microsoft.com/office/drawing/2014/main" id="{D3903E55-CD25-6789-7759-AD5167174C32}"/>
               </a:ext>
             </a:extLst>
           </p:cNvPr>
-          <p:cNvSpPr>
-            <a:spLocks noGrp="1"/>
-          </p:cNvSpPr>
+          <p:cNvSpPr/>
           <p:nvPr>
-            <p:ph type="body" idx="1"/>
+            <p:custDataLst>
+              <p:tags r:id="rId4"/>
+            </p:custDataLst>
           </p:nvPr>
         </p:nvSpPr>
-        <p:spPr/>
+        <p:spPr>
+          <a:xfrm>
+            <a:off x="0" y="5820032"/>
+            <a:ext cx="12192001" cy="1037968"/>
+          </a:xfrm>
+          <a:prstGeom prst="rect">
+            <a:avLst/>
+          </a:prstGeom>
+          <a:solidFill>
+            <a:srgbClr val="198038"/>
+          </a:solidFill>
+          <a:ln w="25400" cap="flat" cmpd="sng" algn="ctr">
+            <a:noFill/>
+            <a:prstDash val="solid"/>
+          </a:ln>
+          <a:effectLst/>
+          <a:extLst>
+            <a:ext uri="{91240B29-F687-4F45-9708-019B960494DF}">
+              <a14:hiddenLine xmlns:a14="http://schemas.microsoft.com/office/drawing/2010/main" w="25400" cap="flat" cmpd="sng" algn="ctr">
+                <a:solidFill>
+                  <a:schemeClr val="accent1">
+                    <a:shade val="15000"/>
+                  </a:schemeClr>
+                </a:solidFill>
+                <a:prstDash val="solid"/>
+              </a14:hiddenLine>
+            </a:ext>
+          </a:extLst>
+        </p:spPr>
+        <p:style>
+          <a:lnRef idx="2">
+            <a:schemeClr val="accent1">
+              <a:shade val="15000"/>
+            </a:schemeClr>
+          </a:lnRef>
+          <a:fillRef idx="1">
+            <a:schemeClr val="accent1"/>
+          </a:fillRef>
+          <a:effectRef idx="0">
+            <a:schemeClr val="accent1"/>
+          </a:effectRef>
+          <a:fontRef idx="minor">
+            <a:schemeClr val="lt1"/>
+          </a:fontRef>
+        </p:style>
         <p:txBody>
-          <a:bodyPr/>
+          <a:bodyPr lIns="741155" tIns="259492" rIns="1852888" bIns="203886" rtlCol="0" anchor="ctr">
+            <a:normAutofit fontScale="85000" lnSpcReduction="10000"/>
+          </a:bodyPr>
           <a:lstStyle/>
           <a:p>
-            <a:endParaRPr lang="en-US"/>
+            <a:r>
+              <a:rPr lang="en-US" sz="2600">
+                <a:solidFill>
+                  <a:srgbClr val="FFFFFF"/>
+                </a:solidFill>
+              </a:rPr>
+              <a:t>The </a:t>
+            </a:r>
+            <a:r>
+              <a:rPr lang="en-US" sz="2600">
+                <a:solidFill>
+                  <a:srgbClr val="FFFFFF"/>
+                </a:solidFill>
+                <a:hlinkClick r:id="rId8">
+                  <a:extLst>
+                    <a:ext uri="{A12FA001-AC4F-418D-AE19-62706E023703}">
+                      <ahyp:hlinkClr xmlns:ahyp="http://schemas.microsoft.com/office/drawing/2018/hyperlinkcolor" val="tx"/>
+                    </a:ext>
+                  </a:extLst>
+                </a:hlinkClick>
+              </a:rPr>
+              <a:t>Slido app</a:t>
+            </a:r>
+            <a:r>
+              <a:rPr lang="en-US" sz="2600">
+                <a:solidFill>
+                  <a:srgbClr val="FFFFFF"/>
+                </a:solidFill>
+              </a:rPr>
+              <a:t> must be installed on every computer you’re presenting from</a:t>
+            </a:r>
           </a:p>
         </p:txBody>
       </p:sp>
+      <p:pic>
+        <p:nvPicPr>
+          <p:cNvPr id="6" name="Graphic 5">
+            <a:extLst>
+              <a:ext uri="{FF2B5EF4-FFF2-40B4-BE49-F238E27FC236}">
+                <a16:creationId xmlns:a16="http://schemas.microsoft.com/office/drawing/2014/main" id="{58BE1855-47E3-28DE-C37C-6978C1C76273}"/>
+              </a:ext>
+            </a:extLst>
+          </p:cNvPr>
+          <p:cNvPicPr>
+            <a:picLocks/>
+          </p:cNvPicPr>
+          <p:nvPr/>
+        </p:nvPicPr>
+        <p:blipFill>
+          <a:blip>
+            <a:extLst>
+              <a:ext uri="{96DAC541-7B7A-43D3-8B79-37D633B846F1}">
+                <asvg:svgBlip xmlns:asvg="http://schemas.microsoft.com/office/drawing/2016/SVG/main" r:embed="rId9"/>
+              </a:ext>
+            </a:extLst>
+          </a:blip>
+          <a:stretch>
+            <a:fillRect/>
+          </a:stretch>
+        </p:blipFill>
+        <p:spPr>
+          <a:xfrm>
+            <a:off x="296462" y="6190785"/>
+            <a:ext cx="296462" cy="296462"/>
+          </a:xfrm>
+          <a:prstGeom prst="rect">
+            <a:avLst/>
+          </a:prstGeom>
+        </p:spPr>
+      </p:pic>
+      <p:sp>
+        <p:nvSpPr>
+          <p:cNvPr id="7" name="Trapezoid 6">
+            <a:extLst>
+              <a:ext uri="{FF2B5EF4-FFF2-40B4-BE49-F238E27FC236}">
+                <a16:creationId xmlns:a16="http://schemas.microsoft.com/office/drawing/2014/main" id="{A0401E05-446C-6510-C850-EB97AB3DFDBC}"/>
+              </a:ext>
+            </a:extLst>
+          </p:cNvPr>
+          <p:cNvSpPr/>
+          <p:nvPr>
+            <p:custDataLst>
+              <p:tags r:id="rId5"/>
+            </p:custDataLst>
+          </p:nvPr>
+        </p:nvSpPr>
+        <p:spPr>
+          <a:xfrm rot="2700000">
+            <a:off x="9620371" y="514924"/>
+            <a:ext cx="3335198" cy="778213"/>
+          </a:xfrm>
+          <a:prstGeom prst="trapezoid">
+            <a:avLst>
+              <a:gd name="adj" fmla="val 100000"/>
+            </a:avLst>
+          </a:prstGeom>
+          <a:solidFill>
+            <a:srgbClr val="0A3316"/>
+          </a:solidFill>
+          <a:ln w="25400" cap="flat" cmpd="sng" algn="ctr">
+            <a:noFill/>
+            <a:prstDash val="solid"/>
+          </a:ln>
+          <a:effectLst/>
+          <a:extLst>
+            <a:ext uri="{91240B29-F687-4F45-9708-019B960494DF}">
+              <a14:hiddenLine xmlns:a14="http://schemas.microsoft.com/office/drawing/2010/main" w="25400" cap="flat" cmpd="sng" algn="ctr">
+                <a:solidFill>
+                  <a:schemeClr val="accent1">
+                    <a:shade val="15000"/>
+                  </a:schemeClr>
+                </a:solidFill>
+                <a:prstDash val="solid"/>
+              </a14:hiddenLine>
+            </a:ext>
+          </a:extLst>
+        </p:spPr>
+        <p:style>
+          <a:lnRef idx="2">
+            <a:schemeClr val="accent1">
+              <a:shade val="15000"/>
+            </a:schemeClr>
+          </a:lnRef>
+          <a:fillRef idx="1">
+            <a:schemeClr val="accent1"/>
+          </a:fillRef>
+          <a:effectRef idx="0">
+            <a:schemeClr val="accent1"/>
+          </a:effectRef>
+          <a:fontRef idx="minor">
+            <a:schemeClr val="lt1"/>
+          </a:fontRef>
+        </p:style>
+        <p:txBody>
+          <a:bodyPr tIns="0" bIns="0" rtlCol="0" anchor="t">
+            <a:normAutofit fontScale="70000" lnSpcReduction="20000"/>
+          </a:bodyPr>
+          <a:lstStyle/>
+          <a:p>
+            <a:pPr algn="ctr"/>
+            <a:r>
+              <a:rPr lang="en-US" sz="2600" b="1">
+                <a:solidFill>
+                  <a:srgbClr val="42A65F"/>
+                </a:solidFill>
+              </a:rPr>
+              <a:t>Do not edit
+</a:t>
+            </a:r>
+            <a:r>
+              <a:rPr lang="en-US" sz="2200">
+                <a:solidFill>
+                  <a:srgbClr val="42A65F"/>
+                </a:solidFill>
+                <a:hlinkClick r:id="rId10">
+                  <a:extLst>
+                    <a:ext uri="{A12FA001-AC4F-418D-AE19-62706E023703}">
+                      <ahyp:hlinkClr xmlns:ahyp="http://schemas.microsoft.com/office/drawing/2018/hyperlinkcolor" val="tx"/>
+                    </a:ext>
+                  </a:extLst>
+                </a:hlinkClick>
+              </a:rPr>
+              <a:t>How to change the design</a:t>
+            </a:r>
+            <a:endParaRPr lang="en-US" sz="2200">
+              <a:solidFill>
+                <a:srgbClr val="42A65F"/>
+              </a:solidFill>
+            </a:endParaRPr>
+          </a:p>
+        </p:txBody>
+      </p:sp>
+      <p:pic>
+        <p:nvPicPr>
+          <p:cNvPr id="9" name="Graphic 8">
+            <a:extLst>
+              <a:ext uri="{FF2B5EF4-FFF2-40B4-BE49-F238E27FC236}">
+                <a16:creationId xmlns:a16="http://schemas.microsoft.com/office/drawing/2014/main" id="{C43FB206-39C7-A9CC-1589-1183FBACDD5E}"/>
+              </a:ext>
+            </a:extLst>
+          </p:cNvPr>
+          <p:cNvPicPr>
+            <a:picLocks/>
+          </p:cNvPicPr>
+          <p:nvPr/>
+        </p:nvPicPr>
+        <p:blipFill>
+          <a:blip>
+            <a:extLst>
+              <a:ext uri="{96DAC541-7B7A-43D3-8B79-37D633B846F1}">
+                <asvg:svgBlip xmlns:asvg="http://schemas.microsoft.com/office/drawing/2016/SVG/main" r:embed="rId11"/>
+              </a:ext>
+            </a:extLst>
+          </a:blip>
+          <a:stretch>
+            <a:fillRect/>
+          </a:stretch>
+        </p:blipFill>
+        <p:spPr>
+          <a:xfrm>
+            <a:off x="10746748" y="6153727"/>
+            <a:ext cx="1111733" cy="370578"/>
+          </a:xfrm>
+          <a:prstGeom prst="rect">
+            <a:avLst/>
+          </a:prstGeom>
+        </p:spPr>
+      </p:pic>
     </p:spTree>
+    <p:custDataLst>
+      <p:tags r:id="rId1"/>
+    </p:custDataLst>
     <p:extLst>
       <p:ext uri="{BB962C8B-B14F-4D97-AF65-F5344CB8AC3E}">
-        <p14:creationId xmlns:p14="http://schemas.microsoft.com/office/powerpoint/2010/main" val="106807354"/>
+        <p14:creationId xmlns:p14="http://schemas.microsoft.com/office/powerpoint/2010/main" val="320285337"/>
       </p:ext>
     </p:extLst>
   </p:cSld>
   <p:clrMapOvr>
     <a:masterClrMapping/>
   </p:clrMapOvr>
-  <mc:AlternateContent xmlns:mc="http://schemas.openxmlformats.org/markup-compatibility/2006" xmlns:p14="http://schemas.microsoft.com/office/powerpoint/2010/main">
-    <mc:Choice Requires="p14">
-      <p:transition spd="med" p14:dur="700">
-        <p:fade/>
-      </p:transition>
-    </mc:Choice>
-    <mc:Fallback xmlns="">
-      <p:transition spd="med">
-        <p:fade/>
-      </p:transition>
-    </mc:Fallback>
-  </mc:AlternateContent>
+  <p:timing>
+    <p:tnLst>
+      <p:par>
+        <p:cTn id="1" dur="indefinite" restart="never" nodeType="tmRoot">
+          <p:childTnLst>
+            <p:seq concurrent="1" nextAc="seek">
+              <p:cTn id="2" dur="indefinite" nodeType="mainSeq">
+                <p:childTnLst>
+                  <p:par>
+                    <p:cTn id="3" fill="hold">
+                      <p:stCondLst>
+                        <p:cond delay="indefinite"/>
+                      </p:stCondLst>
+                      <p:childTnLst>
+                        <p:par>
+                          <p:cTn id="4" fill="hold">
+                            <p:stCondLst>
+                              <p:cond delay="0"/>
+                            </p:stCondLst>
+                            <p:childTnLst>
+                              <p:par>
+                                <p:cTn id="5" presetID="26" presetClass="emph" presetSubtype="0" fill="hold" grpId="0" nodeType="clickEffect">
+                                  <p:stCondLst>
+                                    <p:cond delay="0"/>
+                                  </p:stCondLst>
+                                  <p:childTnLst>
+                                    <p:animEffect transition="out" filter="fade">
+                                      <p:cBhvr>
+                                        <p:cTn id="6" dur="50" tmFilter="0, 0; .2, .5; .8, .5; 1, 0"/>
+                                        <p:tgtEl>
+                                          <p:spTgt spid="3"/>
+                                        </p:tgtEl>
+                                      </p:cBhvr>
+                                    </p:animEffect>
+                                    <p:animScale>
+                                      <p:cBhvr>
+                                        <p:cTn id="7" dur="25" autoRev="1" fill="hold"/>
+                                        <p:tgtEl>
+                                          <p:spTgt spid="3"/>
+                                        </p:tgtEl>
+                                      </p:cBhvr>
+                                      <p:by x="105000" y="105000"/>
+                                    </p:animScale>
+                                  </p:childTnLst>
+                                </p:cTn>
+                              </p:par>
+                            </p:childTnLst>
+                          </p:cTn>
+                        </p:par>
+                      </p:childTnLst>
+                    </p:cTn>
+                  </p:par>
+                </p:childTnLst>
+              </p:cTn>
+              <p:prevCondLst>
+                <p:cond evt="onPrev" delay="0">
+                  <p:tgtEl>
+                    <p:sldTgt/>
+                  </p:tgtEl>
+                </p:cond>
+              </p:prevCondLst>
+              <p:nextCondLst>
+                <p:cond evt="onNext" delay="0">
+                  <p:tgtEl>
+                    <p:sldTgt/>
+                  </p:tgtEl>
+                </p:cond>
+              </p:nextCondLst>
+            </p:seq>
+          </p:childTnLst>
+        </p:cTn>
+      </p:par>
+    </p:tnLst>
+    <p:bldLst>
+      <p:bldP spid="3" grpId="0"/>
+    </p:bldLst>
+  </p:timing>
 </p:sld>
 </file>
 
 <file path=ppt/slides/slide11.xml><?xml version="1.0" encoding="utf-8"?>
-<p:sld xmlns:a="http://schemas.openxmlformats.org/drawingml/2006/main" xmlns:r="http://schemas.openxmlformats.org/officeDocument/2006/relationships" xmlns:p="http://schemas.openxmlformats.org/presentationml/2006/main">
-  <p:cSld>
-    <p:spTree>
-      <p:nvGrpSpPr>
-        <p:cNvPr id="1" name=""/>
-        <p:cNvGrpSpPr/>
-        <p:nvPr/>
-      </p:nvGrpSpPr>
-      <p:grpSpPr>
-        <a:xfrm>
-          <a:off x="0" y="0"/>
-          <a:ext cx="0" cy="0"/>
-          <a:chOff x="0" y="0"/>
-          <a:chExt cx="0" cy="0"/>
-        </a:xfrm>
-      </p:grpSpPr>
-      <p:sp>
-        <p:nvSpPr>
-          <p:cNvPr id="4" name="Title 3">
-            <a:extLst>
-              <a:ext uri="{FF2B5EF4-FFF2-40B4-BE49-F238E27FC236}">
-                <a16:creationId xmlns:a16="http://schemas.microsoft.com/office/drawing/2014/main" id="{30C2C959-72F2-EF4D-80DA-F48A29D0F3C4}"/>
-              </a:ext>
-            </a:extLst>
-          </p:cNvPr>
-          <p:cNvSpPr>
-            <a:spLocks noGrp="1"/>
-          </p:cNvSpPr>
-          <p:nvPr>
-            <p:ph type="title"/>
-          </p:nvPr>
-        </p:nvSpPr>
-        <p:spPr/>
-        <p:txBody>
-          <a:bodyPr/>
-          <a:lstStyle/>
-          <a:p>
-            <a:r>
-              <a:rPr lang="en-US" dirty="0"/>
-              <a:t>What do we need our selected model to do?</a:t>
-            </a:r>
-          </a:p>
-        </p:txBody>
-      </p:sp>
-      <p:sp>
-        <p:nvSpPr>
-          <p:cNvPr id="5" name="Text Placeholder 4">
-            <a:extLst>
-              <a:ext uri="{FF2B5EF4-FFF2-40B4-BE49-F238E27FC236}">
-                <a16:creationId xmlns:a16="http://schemas.microsoft.com/office/drawing/2014/main" id="{24A75FF1-9EFE-0F41-92F5-3E749CFB2EB5}"/>
-              </a:ext>
-            </a:extLst>
-          </p:cNvPr>
-          <p:cNvSpPr>
-            <a:spLocks noGrp="1"/>
-          </p:cNvSpPr>
-          <p:nvPr>
-            <p:ph type="body" idx="1"/>
-          </p:nvPr>
-        </p:nvSpPr>
-        <p:spPr/>
-        <p:txBody>
-          <a:bodyPr/>
-          <a:lstStyle/>
-          <a:p>
-            <a:r>
-              <a:rPr lang="en-US" dirty="0"/>
-              <a:t>Perform well</a:t>
-            </a:r>
-          </a:p>
-          <a:p>
-            <a:pPr lvl="1"/>
-            <a:r>
-              <a:rPr lang="en-US" dirty="0"/>
-              <a:t>What metric?</a:t>
-            </a:r>
-          </a:p>
-          <a:p>
-            <a:pPr lvl="1"/>
-            <a:r>
-              <a:rPr lang="en-US" dirty="0"/>
-              <a:t>Compared to what?</a:t>
-            </a:r>
-          </a:p>
-          <a:p>
-            <a:endParaRPr lang="en-US" dirty="0"/>
-          </a:p>
-          <a:p>
-            <a:r>
-              <a:rPr lang="en-US" dirty="0"/>
-              <a:t>Generalize</a:t>
-            </a:r>
-          </a:p>
-          <a:p>
-            <a:pPr lvl="1"/>
-            <a:r>
-              <a:rPr lang="en-US" dirty="0"/>
-              <a:t>To what?</a:t>
-            </a:r>
-          </a:p>
-        </p:txBody>
-      </p:sp>
-    </p:spTree>
-    <p:extLst>
-      <p:ext uri="{BB962C8B-B14F-4D97-AF65-F5344CB8AC3E}">
-        <p14:creationId xmlns:p14="http://schemas.microsoft.com/office/powerpoint/2010/main" val="4111643116"/>
-      </p:ext>
-    </p:extLst>
-  </p:cSld>
-  <p:clrMapOvr>
-    <a:masterClrMapping/>
-  </p:clrMapOvr>
-  <mc:AlternateContent xmlns:mc="http://schemas.openxmlformats.org/markup-compatibility/2006" xmlns:p14="http://schemas.microsoft.com/office/powerpoint/2010/main">
-    <mc:Choice Requires="p14">
-      <p:transition spd="med" p14:dur="700">
-        <p:fade/>
-      </p:transition>
-    </mc:Choice>
-    <mc:Fallback xmlns="">
-      <p:transition spd="med">
-        <p:fade/>
-      </p:transition>
-    </mc:Fallback>
-  </mc:AlternateContent>
-</p:sld>
-</file>
-
-<file path=ppt/slides/slide12.xml><?xml version="1.0" encoding="utf-8"?>
 <p:sld xmlns:a="http://schemas.openxmlformats.org/drawingml/2006/main" xmlns:r="http://schemas.openxmlformats.org/officeDocument/2006/relationships" xmlns:p="http://schemas.openxmlformats.org/presentationml/2006/main" show="0">
   <p:cSld>
     <p:spTree>
@@ -10390,532 +10679,7 @@
 </p:sld>
 </file>
 
-<file path=ppt/slides/slide13.xml><?xml version="1.0" encoding="utf-8"?>
-<p:sld xmlns:a="http://schemas.openxmlformats.org/drawingml/2006/main" xmlns:r="http://schemas.openxmlformats.org/officeDocument/2006/relationships" xmlns:p="http://schemas.openxmlformats.org/presentationml/2006/main" showMasterSp="0">
-  <p:cSld>
-    <p:bg>
-      <p:bgPr>
-        <a:solidFill>
-          <a:srgbClr val="FFFFFF"/>
-        </a:solidFill>
-        <a:effectLst/>
-      </p:bgPr>
-    </p:bg>
-    <p:spTree>
-      <p:nvGrpSpPr>
-        <p:cNvPr id="1" name=""/>
-        <p:cNvGrpSpPr/>
-        <p:nvPr/>
-      </p:nvGrpSpPr>
-      <p:grpSpPr>
-        <a:xfrm>
-          <a:off x="0" y="0"/>
-          <a:ext cx="0" cy="0"/>
-          <a:chOff x="0" y="0"/>
-          <a:chExt cx="0" cy="0"/>
-        </a:xfrm>
-      </p:grpSpPr>
-      <p:sp>
-        <p:nvSpPr>
-          <p:cNvPr id="2" name="Rectangle 1">
-            <a:extLst>
-              <a:ext uri="{FF2B5EF4-FFF2-40B4-BE49-F238E27FC236}">
-                <a16:creationId xmlns:a16="http://schemas.microsoft.com/office/drawing/2014/main" id="{2A11673C-D710-CE32-3439-5831A0850EF3}"/>
-              </a:ext>
-            </a:extLst>
-          </p:cNvPr>
-          <p:cNvSpPr/>
-          <p:nvPr>
-            <p:custDataLst>
-              <p:tags r:id="rId2"/>
-            </p:custDataLst>
-          </p:nvPr>
-        </p:nvSpPr>
-        <p:spPr>
-          <a:xfrm>
-            <a:off x="444693" y="1742703"/>
-            <a:ext cx="2371696" cy="2371696"/>
-          </a:xfrm>
-          <a:prstGeom prst="rect">
-            <a:avLst/>
-          </a:prstGeom>
-          <a:blipFill>
-            <a:blip r:embed="rId5">
-              <a:extLst>
-                <a:ext uri="{96DAC541-7B7A-43D3-8B79-37D633B846F1}">
-                  <asvg:svgBlip xmlns:asvg="http://schemas.microsoft.com/office/drawing/2016/SVG/main" r:embed="rId6"/>
-                </a:ext>
-              </a:extLst>
-            </a:blip>
-            <a:stretch>
-              <a:fillRect/>
-            </a:stretch>
-          </a:blipFill>
-          <a:ln>
-            <a:solidFill>
-              <a:srgbClr val="FFFFFF"/>
-            </a:solidFill>
-          </a:ln>
-        </p:spPr>
-        <p:style>
-          <a:lnRef idx="2">
-            <a:schemeClr val="accent1">
-              <a:shade val="15000"/>
-            </a:schemeClr>
-          </a:lnRef>
-          <a:fillRef idx="1">
-            <a:schemeClr val="accent1"/>
-          </a:fillRef>
-          <a:effectRef idx="0">
-            <a:schemeClr val="accent1"/>
-          </a:effectRef>
-          <a:fontRef idx="minor">
-            <a:schemeClr val="lt1"/>
-          </a:fontRef>
-        </p:style>
-        <p:txBody>
-          <a:bodyPr rtlCol="0" anchor="ctr"/>
-          <a:lstStyle/>
-          <a:p>
-            <a:pPr algn="ctr"/>
-            <a:endParaRPr lang="en-US"/>
-          </a:p>
-        </p:txBody>
-      </p:sp>
-      <p:sp>
-        <p:nvSpPr>
-          <p:cNvPr id="3" name="Rectangle 2">
-            <a:extLst>
-              <a:ext uri="{FF2B5EF4-FFF2-40B4-BE49-F238E27FC236}">
-                <a16:creationId xmlns:a16="http://schemas.microsoft.com/office/drawing/2014/main" id="{5E7D0217-9098-B8E2-2663-DCD2D1613E1B}"/>
-              </a:ext>
-            </a:extLst>
-          </p:cNvPr>
-          <p:cNvSpPr/>
-          <p:nvPr>
-            <p:custDataLst>
-              <p:tags r:id="rId3"/>
-            </p:custDataLst>
-          </p:nvPr>
-        </p:nvSpPr>
-        <p:spPr>
-          <a:xfrm>
-            <a:off x="3112851" y="1000897"/>
-            <a:ext cx="8486226" cy="3855308"/>
-          </a:xfrm>
-          <a:prstGeom prst="rect">
-            <a:avLst/>
-          </a:prstGeom>
-          <a:noFill/>
-          <a:ln w="25400" cap="flat" cmpd="sng" algn="ctr">
-            <a:solidFill>
-              <a:srgbClr val="FFFFFF"/>
-            </a:solidFill>
-            <a:prstDash val="solid"/>
-          </a:ln>
-          <a:effectLst/>
-          <a:extLst>
-            <a:ext uri="{909E8E84-426E-40DD-AFC4-6F175D3DCCD1}">
-              <a14:hiddenFill xmlns:a14="http://schemas.microsoft.com/office/drawing/2010/main">
-                <a:solidFill>
-                  <a:schemeClr val="accent1"/>
-                </a:solidFill>
-              </a14:hiddenFill>
-            </a:ext>
-          </a:extLst>
-        </p:spPr>
-        <p:style>
-          <a:lnRef idx="2">
-            <a:schemeClr val="accent1">
-              <a:shade val="15000"/>
-            </a:schemeClr>
-          </a:lnRef>
-          <a:fillRef idx="1">
-            <a:schemeClr val="accent1"/>
-          </a:fillRef>
-          <a:effectRef idx="0">
-            <a:schemeClr val="accent1"/>
-          </a:effectRef>
-          <a:fontRef idx="minor">
-            <a:schemeClr val="lt1"/>
-          </a:fontRef>
-        </p:style>
-        <p:txBody>
-          <a:bodyPr rtlCol="0" anchor="ctr"/>
-          <a:lstStyle/>
-          <a:p>
-            <a:r>
-              <a:rPr lang="en-US" sz="2400" b="1">
-                <a:solidFill>
-                  <a:srgbClr val="000000"/>
-                </a:solidFill>
-              </a:rPr>
-              <a:t>You're working for a non-profit and a vendor is trying to sell you a donation propensity model that is validated to have 98% accuracy. Is this model good enough for your organization to purchase?</a:t>
-            </a:r>
-          </a:p>
-        </p:txBody>
-      </p:sp>
-      <p:sp>
-        <p:nvSpPr>
-          <p:cNvPr id="4" name="Rectangle 3">
-            <a:extLst>
-              <a:ext uri="{FF2B5EF4-FFF2-40B4-BE49-F238E27FC236}">
-                <a16:creationId xmlns:a16="http://schemas.microsoft.com/office/drawing/2014/main" id="{2FECB588-FD4A-3F65-685A-12D9F28ECD2A}"/>
-              </a:ext>
-            </a:extLst>
-          </p:cNvPr>
-          <p:cNvSpPr/>
-          <p:nvPr/>
-        </p:nvSpPr>
-        <p:spPr>
-          <a:xfrm>
-            <a:off x="0" y="5820032"/>
-            <a:ext cx="12192001" cy="1037968"/>
-          </a:xfrm>
-          <a:prstGeom prst="rect">
-            <a:avLst/>
-          </a:prstGeom>
-          <a:solidFill>
-            <a:srgbClr val="198038"/>
-          </a:solidFill>
-          <a:ln w="25400" cap="flat" cmpd="sng" algn="ctr">
-            <a:noFill/>
-            <a:prstDash val="solid"/>
-          </a:ln>
-          <a:effectLst/>
-          <a:extLst>
-            <a:ext uri="{91240B29-F687-4F45-9708-019B960494DF}">
-              <a14:hiddenLine xmlns:a14="http://schemas.microsoft.com/office/drawing/2010/main" w="25400" cap="flat" cmpd="sng" algn="ctr">
-                <a:solidFill>
-                  <a:schemeClr val="accent1">
-                    <a:shade val="15000"/>
-                  </a:schemeClr>
-                </a:solidFill>
-                <a:prstDash val="solid"/>
-              </a14:hiddenLine>
-            </a:ext>
-          </a:extLst>
-        </p:spPr>
-        <p:style>
-          <a:lnRef idx="2">
-            <a:schemeClr val="accent1">
-              <a:shade val="15000"/>
-            </a:schemeClr>
-          </a:lnRef>
-          <a:fillRef idx="1">
-            <a:schemeClr val="accent1"/>
-          </a:fillRef>
-          <a:effectRef idx="0">
-            <a:schemeClr val="accent1"/>
-          </a:effectRef>
-          <a:fontRef idx="minor">
-            <a:schemeClr val="lt1"/>
-          </a:fontRef>
-        </p:style>
-        <p:txBody>
-          <a:bodyPr lIns="741155" tIns="259492" rIns="1852888" bIns="203886" rtlCol="0" anchor="ctr">
-            <a:normAutofit fontScale="85000" lnSpcReduction="10000"/>
-          </a:bodyPr>
-          <a:lstStyle/>
-          <a:p>
-            <a:r>
-              <a:rPr lang="en-US" sz="2600">
-                <a:solidFill>
-                  <a:srgbClr val="FFFFFF"/>
-                </a:solidFill>
-              </a:rPr>
-              <a:t>The </a:t>
-            </a:r>
-            <a:r>
-              <a:rPr lang="en-US" sz="2600">
-                <a:solidFill>
-                  <a:srgbClr val="FFFFFF"/>
-                </a:solidFill>
-                <a:hlinkClick r:id="rId7">
-                  <a:extLst>
-                    <a:ext uri="{A12FA001-AC4F-418D-AE19-62706E023703}">
-                      <ahyp:hlinkClr xmlns:ahyp="http://schemas.microsoft.com/office/drawing/2018/hyperlinkcolor" val="tx"/>
-                    </a:ext>
-                  </a:extLst>
-                </a:hlinkClick>
-              </a:rPr>
-              <a:t>Slido app</a:t>
-            </a:r>
-            <a:r>
-              <a:rPr lang="en-US" sz="2600">
-                <a:solidFill>
-                  <a:srgbClr val="FFFFFF"/>
-                </a:solidFill>
-              </a:rPr>
-              <a:t> must be installed on every computer you’re presenting from</a:t>
-            </a:r>
-          </a:p>
-        </p:txBody>
-      </p:sp>
-      <p:pic>
-        <p:nvPicPr>
-          <p:cNvPr id="6" name="Graphic 5">
-            <a:extLst>
-              <a:ext uri="{FF2B5EF4-FFF2-40B4-BE49-F238E27FC236}">
-                <a16:creationId xmlns:a16="http://schemas.microsoft.com/office/drawing/2014/main" id="{E9BD49F9-7FE2-4674-49C3-CE5C64C966F2}"/>
-              </a:ext>
-            </a:extLst>
-          </p:cNvPr>
-          <p:cNvPicPr>
-            <a:picLocks/>
-          </p:cNvPicPr>
-          <p:nvPr/>
-        </p:nvPicPr>
-        <p:blipFill>
-          <a:blip r:embed="rId8">
-            <a:extLst>
-              <a:ext uri="{96DAC541-7B7A-43D3-8B79-37D633B846F1}">
-                <asvg:svgBlip xmlns:asvg="http://schemas.microsoft.com/office/drawing/2016/SVG/main" r:embed="rId9"/>
-              </a:ext>
-            </a:extLst>
-          </a:blip>
-          <a:stretch>
-            <a:fillRect/>
-          </a:stretch>
-        </p:blipFill>
-        <p:spPr>
-          <a:xfrm>
-            <a:off x="296462" y="6190785"/>
-            <a:ext cx="296462" cy="296462"/>
-          </a:xfrm>
-          <a:prstGeom prst="rect">
-            <a:avLst/>
-          </a:prstGeom>
-        </p:spPr>
-      </p:pic>
-      <p:sp>
-        <p:nvSpPr>
-          <p:cNvPr id="7" name="Trapezoid 6">
-            <a:extLst>
-              <a:ext uri="{FF2B5EF4-FFF2-40B4-BE49-F238E27FC236}">
-                <a16:creationId xmlns:a16="http://schemas.microsoft.com/office/drawing/2014/main" id="{163187ED-B561-B8B8-BD21-5919586155B4}"/>
-              </a:ext>
-            </a:extLst>
-          </p:cNvPr>
-          <p:cNvSpPr/>
-          <p:nvPr/>
-        </p:nvSpPr>
-        <p:spPr>
-          <a:xfrm rot="2700000">
-            <a:off x="9620371" y="514924"/>
-            <a:ext cx="3335198" cy="778213"/>
-          </a:xfrm>
-          <a:prstGeom prst="trapezoid">
-            <a:avLst>
-              <a:gd name="adj" fmla="val 100000"/>
-            </a:avLst>
-          </a:prstGeom>
-          <a:solidFill>
-            <a:srgbClr val="EDFAF2"/>
-          </a:solidFill>
-          <a:ln w="25400" cap="flat" cmpd="sng" algn="ctr">
-            <a:noFill/>
-            <a:prstDash val="solid"/>
-          </a:ln>
-          <a:effectLst/>
-          <a:extLst>
-            <a:ext uri="{91240B29-F687-4F45-9708-019B960494DF}">
-              <a14:hiddenLine xmlns:a14="http://schemas.microsoft.com/office/drawing/2010/main" w="25400" cap="flat" cmpd="sng" algn="ctr">
-                <a:solidFill>
-                  <a:schemeClr val="accent1">
-                    <a:shade val="15000"/>
-                  </a:schemeClr>
-                </a:solidFill>
-                <a:prstDash val="solid"/>
-              </a14:hiddenLine>
-            </a:ext>
-          </a:extLst>
-        </p:spPr>
-        <p:style>
-          <a:lnRef idx="2">
-            <a:schemeClr val="accent1">
-              <a:shade val="15000"/>
-            </a:schemeClr>
-          </a:lnRef>
-          <a:fillRef idx="1">
-            <a:schemeClr val="accent1"/>
-          </a:fillRef>
-          <a:effectRef idx="0">
-            <a:schemeClr val="accent1"/>
-          </a:effectRef>
-          <a:fontRef idx="minor">
-            <a:schemeClr val="lt1"/>
-          </a:fontRef>
-        </p:style>
-        <p:txBody>
-          <a:bodyPr tIns="0" bIns="0" rtlCol="0" anchor="t">
-            <a:normAutofit fontScale="70000" lnSpcReduction="20000"/>
-          </a:bodyPr>
-          <a:lstStyle/>
-          <a:p>
-            <a:pPr algn="ctr"/>
-            <a:r>
-              <a:rPr lang="en-US" sz="2600" b="1">
-                <a:solidFill>
-                  <a:srgbClr val="198038"/>
-                </a:solidFill>
-              </a:rPr>
-              <a:t>Do not edit
-</a:t>
-            </a:r>
-            <a:r>
-              <a:rPr lang="en-US" sz="2200">
-                <a:solidFill>
-                  <a:srgbClr val="198038"/>
-                </a:solidFill>
-                <a:hlinkClick r:id="rId10">
-                  <a:extLst>
-                    <a:ext uri="{A12FA001-AC4F-418D-AE19-62706E023703}">
-                      <ahyp:hlinkClr xmlns:ahyp="http://schemas.microsoft.com/office/drawing/2018/hyperlinkcolor" val="tx"/>
-                    </a:ext>
-                  </a:extLst>
-                </a:hlinkClick>
-              </a:rPr>
-              <a:t>How to change the design</a:t>
-            </a:r>
-            <a:endParaRPr lang="en-US" sz="2200">
-              <a:solidFill>
-                <a:srgbClr val="198038"/>
-              </a:solidFill>
-            </a:endParaRPr>
-          </a:p>
-        </p:txBody>
-      </p:sp>
-      <p:pic>
-        <p:nvPicPr>
-          <p:cNvPr id="9" name="Graphic 8">
-            <a:extLst>
-              <a:ext uri="{FF2B5EF4-FFF2-40B4-BE49-F238E27FC236}">
-                <a16:creationId xmlns:a16="http://schemas.microsoft.com/office/drawing/2014/main" id="{66FBA6F1-F8DD-F2DE-EB11-4FD4E867C575}"/>
-              </a:ext>
-            </a:extLst>
-          </p:cNvPr>
-          <p:cNvPicPr>
-            <a:picLocks/>
-          </p:cNvPicPr>
-          <p:nvPr/>
-        </p:nvPicPr>
-        <p:blipFill>
-          <a:blip r:embed="rId11">
-            <a:extLst>
-              <a:ext uri="{96DAC541-7B7A-43D3-8B79-37D633B846F1}">
-                <asvg:svgBlip xmlns:asvg="http://schemas.microsoft.com/office/drawing/2016/SVG/main" r:embed="rId12"/>
-              </a:ext>
-            </a:extLst>
-          </a:blip>
-          <a:stretch>
-            <a:fillRect/>
-          </a:stretch>
-        </p:blipFill>
-        <p:spPr>
-          <a:xfrm>
-            <a:off x="10746748" y="6153727"/>
-            <a:ext cx="1111733" cy="370578"/>
-          </a:xfrm>
-          <a:prstGeom prst="rect">
-            <a:avLst/>
-          </a:prstGeom>
-        </p:spPr>
-      </p:pic>
-    </p:spTree>
-    <p:custDataLst>
-      <p:tags r:id="rId1"/>
-    </p:custDataLst>
-    <p:extLst>
-      <p:ext uri="{BB962C8B-B14F-4D97-AF65-F5344CB8AC3E}">
-        <p14:creationId xmlns:p14="http://schemas.microsoft.com/office/powerpoint/2010/main" val="2998207951"/>
-      </p:ext>
-    </p:extLst>
-  </p:cSld>
-  <p:clrMapOvr>
-    <a:masterClrMapping/>
-  </p:clrMapOvr>
-  <p:timing>
-    <p:tnLst>
-      <p:par>
-        <p:cTn id="1" dur="indefinite" restart="never" nodeType="tmRoot">
-          <p:childTnLst>
-            <p:seq concurrent="1" nextAc="seek">
-              <p:cTn id="2" dur="indefinite" nodeType="mainSeq">
-                <p:childTnLst>
-                  <p:par>
-                    <p:cTn id="3" fill="hold">
-                      <p:stCondLst>
-                        <p:cond delay="indefinite"/>
-                      </p:stCondLst>
-                      <p:childTnLst>
-                        <p:par>
-                          <p:cTn id="4" fill="hold">
-                            <p:stCondLst>
-                              <p:cond delay="0"/>
-                            </p:stCondLst>
-                            <p:childTnLst>
-                              <p:par>
-                                <p:cTn id="5" presetID="26" presetClass="emph" presetSubtype="0" fill="hold" grpId="0" nodeType="clickEffect">
-                                  <p:stCondLst>
-                                    <p:cond delay="0"/>
-                                  </p:stCondLst>
-                                  <p:childTnLst>
-                                    <p:animEffect transition="out" filter="fade">
-                                      <p:cBhvr>
-                                        <p:cTn id="6" dur="50" tmFilter="0, 0; .2, .5; .8, .5; 1, 0"/>
-                                        <p:tgtEl>
-                                          <p:spTgt spid="3"/>
-                                        </p:tgtEl>
-                                      </p:cBhvr>
-                                    </p:animEffect>
-                                    <p:animScale>
-                                      <p:cBhvr>
-                                        <p:cTn id="7" dur="25" autoRev="1" fill="hold"/>
-                                        <p:tgtEl>
-                                          <p:spTgt spid="3"/>
-                                        </p:tgtEl>
-                                      </p:cBhvr>
-                                      <p:by x="105000" y="105000"/>
-                                    </p:animScale>
-                                  </p:childTnLst>
-                                </p:cTn>
-                              </p:par>
-                            </p:childTnLst>
-                          </p:cTn>
-                        </p:par>
-                      </p:childTnLst>
-                    </p:cTn>
-                  </p:par>
-                </p:childTnLst>
-              </p:cTn>
-              <p:prevCondLst>
-                <p:cond evt="onPrev" delay="0">
-                  <p:tgtEl>
-                    <p:sldTgt/>
-                  </p:tgtEl>
-                </p:cond>
-              </p:prevCondLst>
-              <p:nextCondLst>
-                <p:cond evt="onNext" delay="0">
-                  <p:tgtEl>
-                    <p:sldTgt/>
-                  </p:tgtEl>
-                </p:cond>
-              </p:nextCondLst>
-            </p:seq>
-          </p:childTnLst>
-        </p:cTn>
-      </p:par>
-    </p:tnLst>
-    <p:bldLst>
-      <p:bldP spid="3" grpId="0" animBg="1"/>
-    </p:bldLst>
-  </p:timing>
-</p:sld>
-</file>
-
-<file path=ppt/slides/slide14.xml><?xml version="1.0" encoding="utf-8"?>
+<file path=ppt/slides/slide12.xml><?xml version="1.0" encoding="utf-8"?>
 <p:sld xmlns:a="http://schemas.openxmlformats.org/drawingml/2006/main" xmlns:r="http://schemas.openxmlformats.org/officeDocument/2006/relationships" xmlns:p="http://schemas.openxmlformats.org/presentationml/2006/main">
   <p:cSld>
     <p:spTree>
@@ -10998,7 +10762,7 @@
 </p:sld>
 </file>
 
-<file path=ppt/slides/slide15.xml><?xml version="1.0" encoding="utf-8"?>
+<file path=ppt/slides/slide13.xml><?xml version="1.0" encoding="utf-8"?>
 <p:sld xmlns:a="http://schemas.openxmlformats.org/drawingml/2006/main" xmlns:r="http://schemas.openxmlformats.org/officeDocument/2006/relationships" xmlns:p="http://schemas.openxmlformats.org/presentationml/2006/main">
   <p:cSld>
     <p:spTree>
@@ -11195,7 +10959,7 @@
 </p:sld>
 </file>
 
-<file path=ppt/slides/slide16.xml><?xml version="1.0" encoding="utf-8"?>
+<file path=ppt/slides/slide14.xml><?xml version="1.0" encoding="utf-8"?>
 <p:sld xmlns:a="http://schemas.openxmlformats.org/drawingml/2006/main" xmlns:r="http://schemas.openxmlformats.org/officeDocument/2006/relationships" xmlns:p="http://schemas.openxmlformats.org/presentationml/2006/main">
   <p:cSld>
     <p:spTree>
@@ -12367,7 +12131,7 @@
 </p:sld>
 </file>
 
-<file path=ppt/slides/slide17.xml><?xml version="1.0" encoding="utf-8"?>
+<file path=ppt/slides/slide15.xml><?xml version="1.0" encoding="utf-8"?>
 <p:sld xmlns:a="http://schemas.openxmlformats.org/drawingml/2006/main" xmlns:r="http://schemas.openxmlformats.org/officeDocument/2006/relationships" xmlns:p="http://schemas.openxmlformats.org/presentationml/2006/main">
   <p:cSld>
     <p:spTree>
@@ -13695,7 +13459,7 @@
 </p:sld>
 </file>
 
-<file path=ppt/slides/slide18.xml><?xml version="1.0" encoding="utf-8"?>
+<file path=ppt/slides/slide16.xml><?xml version="1.0" encoding="utf-8"?>
 <p:sld xmlns:a="http://schemas.openxmlformats.org/drawingml/2006/main" xmlns:r="http://schemas.openxmlformats.org/officeDocument/2006/relationships" xmlns:p="http://schemas.openxmlformats.org/presentationml/2006/main">
   <p:cSld>
     <p:spTree>
@@ -13783,7 +13547,7 @@
 </p:sld>
 </file>
 
-<file path=ppt/slides/slide19.xml><?xml version="1.0" encoding="utf-8"?>
+<file path=ppt/slides/slide17.xml><?xml version="1.0" encoding="utf-8"?>
 <p:sld xmlns:a="http://schemas.openxmlformats.org/drawingml/2006/main" xmlns:r="http://schemas.openxmlformats.org/officeDocument/2006/relationships" xmlns:p="http://schemas.openxmlformats.org/presentationml/2006/main">
   <p:cSld>
     <p:spTree>
@@ -13987,413 +13751,7 @@
 </p:sld>
 </file>
 
-<file path=ppt/slides/slide2.xml><?xml version="1.0" encoding="utf-8"?>
-<p:sld xmlns:a="http://schemas.openxmlformats.org/drawingml/2006/main" xmlns:r="http://schemas.openxmlformats.org/officeDocument/2006/relationships" xmlns:p="http://schemas.openxmlformats.org/presentationml/2006/main" show="0">
-  <p:cSld>
-    <p:spTree>
-      <p:nvGrpSpPr>
-        <p:cNvPr id="1" name=""/>
-        <p:cNvGrpSpPr/>
-        <p:nvPr/>
-      </p:nvGrpSpPr>
-      <p:grpSpPr>
-        <a:xfrm>
-          <a:off x="0" y="0"/>
-          <a:ext cx="0" cy="0"/>
-          <a:chOff x="0" y="0"/>
-          <a:chExt cx="0" cy="0"/>
-        </a:xfrm>
-      </p:grpSpPr>
-      <p:sp>
-        <p:nvSpPr>
-          <p:cNvPr id="3" name="Title 2">
-            <a:extLst>
-              <a:ext uri="{FF2B5EF4-FFF2-40B4-BE49-F238E27FC236}">
-                <a16:creationId xmlns:a16="http://schemas.microsoft.com/office/drawing/2014/main" id="{9323871C-7CA8-1448-8FFC-1AE6E1838941}"/>
-              </a:ext>
-            </a:extLst>
-          </p:cNvPr>
-          <p:cNvSpPr>
-            <a:spLocks noGrp="1"/>
-          </p:cNvSpPr>
-          <p:nvPr>
-            <p:ph type="title"/>
-          </p:nvPr>
-        </p:nvSpPr>
-        <p:spPr/>
-        <p:txBody>
-          <a:bodyPr/>
-          <a:lstStyle/>
-          <a:p>
-            <a:r>
-              <a:rPr lang="en-US" dirty="0"/>
-              <a:t>Teamwork Question</a:t>
-            </a:r>
-          </a:p>
-        </p:txBody>
-      </p:sp>
-      <p:sp>
-        <p:nvSpPr>
-          <p:cNvPr id="4" name="Text Placeholder 3">
-            <a:extLst>
-              <a:ext uri="{FF2B5EF4-FFF2-40B4-BE49-F238E27FC236}">
-                <a16:creationId xmlns:a16="http://schemas.microsoft.com/office/drawing/2014/main" id="{5E600BA7-FA45-884F-9820-9E5F2CB7AA48}"/>
-              </a:ext>
-            </a:extLst>
-          </p:cNvPr>
-          <p:cNvSpPr>
-            <a:spLocks noGrp="1"/>
-          </p:cNvSpPr>
-          <p:nvPr>
-            <p:ph type="body" idx="1"/>
-          </p:nvPr>
-        </p:nvSpPr>
-        <p:spPr>
-          <a:xfrm>
-            <a:off x="415600" y="1130134"/>
-            <a:ext cx="11360700" cy="4555200"/>
-          </a:xfrm>
-        </p:spPr>
-        <p:txBody>
-          <a:bodyPr/>
-          <a:lstStyle/>
-          <a:p>
-            <a:pPr marL="76200" indent="0" algn="ctr">
-              <a:buNone/>
-            </a:pPr>
-            <a:r>
-              <a:rPr lang="en-US" sz="3600" dirty="0"/>
-              <a:t>How’s teamwork going?</a:t>
-            </a:r>
-          </a:p>
-        </p:txBody>
-      </p:sp>
-      <p:sp>
-        <p:nvSpPr>
-          <p:cNvPr id="5" name="Text Placeholder 3">
-            <a:extLst>
-              <a:ext uri="{FF2B5EF4-FFF2-40B4-BE49-F238E27FC236}">
-                <a16:creationId xmlns:a16="http://schemas.microsoft.com/office/drawing/2014/main" id="{0CF60459-98F0-E844-AFCC-DC0705B0478D}"/>
-              </a:ext>
-            </a:extLst>
-          </p:cNvPr>
-          <p:cNvSpPr txBox="1">
-            <a:spLocks/>
-          </p:cNvSpPr>
-          <p:nvPr/>
-        </p:nvSpPr>
-        <p:spPr>
-          <a:xfrm>
-            <a:off x="3726942" y="2567943"/>
-            <a:ext cx="4886875" cy="2794571"/>
-          </a:xfrm>
-          <a:prstGeom prst="rect">
-            <a:avLst/>
-          </a:prstGeom>
-          <a:noFill/>
-          <a:ln>
-            <a:noFill/>
-          </a:ln>
-        </p:spPr>
-        <p:txBody>
-          <a:bodyPr spcFirstLastPara="1" wrap="none" lIns="121900" tIns="121900" rIns="121900" bIns="121900" rtlCol="0" anchor="t" anchorCtr="0">
-            <a:spAutoFit/>
-          </a:bodyPr>
-          <a:lstStyle>
-            <a:defPPr marR="0" lvl="0" algn="l" rtl="0">
-              <a:lnSpc>
-                <a:spcPct val="100000"/>
-              </a:lnSpc>
-              <a:spcBef>
-                <a:spcPts val="0"/>
-              </a:spcBef>
-              <a:spcAft>
-                <a:spcPts val="0"/>
-              </a:spcAft>
-            </a:defPPr>
-            <a:lvl1pPr marL="457200" marR="0" lvl="0" indent="-381000" algn="l" rtl="0">
-              <a:lnSpc>
-                <a:spcPct val="115000"/>
-              </a:lnSpc>
-              <a:spcBef>
-                <a:spcPts val="0"/>
-              </a:spcBef>
-              <a:spcAft>
-                <a:spcPts val="0"/>
-              </a:spcAft>
-              <a:buClr>
-                <a:srgbClr val="434343"/>
-              </a:buClr>
-              <a:buSzPts val="2400"/>
-              <a:buFont typeface="Arial"/>
-              <a:buChar char="●"/>
-              <a:defRPr sz="2400" b="0" i="0" u="none" strike="noStrike" cap="none">
-                <a:solidFill>
-                  <a:srgbClr val="434343"/>
-                </a:solidFill>
-                <a:latin typeface="Arial"/>
-                <a:ea typeface="Arial"/>
-                <a:cs typeface="Arial"/>
-                <a:sym typeface="Arial"/>
-              </a:defRPr>
-            </a:lvl1pPr>
-            <a:lvl2pPr marL="914400" marR="0" lvl="1" indent="-349250" algn="l" rtl="0">
-              <a:lnSpc>
-                <a:spcPct val="115000"/>
-              </a:lnSpc>
-              <a:spcBef>
-                <a:spcPts val="2100"/>
-              </a:spcBef>
-              <a:spcAft>
-                <a:spcPts val="0"/>
-              </a:spcAft>
-              <a:buClr>
-                <a:srgbClr val="434343"/>
-              </a:buClr>
-              <a:buSzPts val="1900"/>
-              <a:buFont typeface="Arial"/>
-              <a:buChar char="○"/>
-              <a:defRPr sz="1900" b="0" i="0" u="none" strike="noStrike" cap="none">
-                <a:solidFill>
-                  <a:srgbClr val="434343"/>
-                </a:solidFill>
-                <a:latin typeface="Arial"/>
-                <a:ea typeface="Arial"/>
-                <a:cs typeface="Arial"/>
-                <a:sym typeface="Arial"/>
-              </a:defRPr>
-            </a:lvl2pPr>
-            <a:lvl3pPr marL="1371600" marR="0" lvl="2" indent="-349250" algn="l" rtl="0">
-              <a:lnSpc>
-                <a:spcPct val="115000"/>
-              </a:lnSpc>
-              <a:spcBef>
-                <a:spcPts val="2100"/>
-              </a:spcBef>
-              <a:spcAft>
-                <a:spcPts val="0"/>
-              </a:spcAft>
-              <a:buClr>
-                <a:srgbClr val="434343"/>
-              </a:buClr>
-              <a:buSzPts val="1900"/>
-              <a:buFont typeface="Arial"/>
-              <a:buChar char="■"/>
-              <a:defRPr sz="1900" b="0" i="0" u="none" strike="noStrike" cap="none">
-                <a:solidFill>
-                  <a:srgbClr val="434343"/>
-                </a:solidFill>
-                <a:latin typeface="Arial"/>
-                <a:ea typeface="Arial"/>
-                <a:cs typeface="Arial"/>
-                <a:sym typeface="Arial"/>
-              </a:defRPr>
-            </a:lvl3pPr>
-            <a:lvl4pPr marL="1828800" marR="0" lvl="3" indent="-349250" algn="l" rtl="0">
-              <a:lnSpc>
-                <a:spcPct val="115000"/>
-              </a:lnSpc>
-              <a:spcBef>
-                <a:spcPts val="2100"/>
-              </a:spcBef>
-              <a:spcAft>
-                <a:spcPts val="0"/>
-              </a:spcAft>
-              <a:buClr>
-                <a:srgbClr val="434343"/>
-              </a:buClr>
-              <a:buSzPts val="1900"/>
-              <a:buFont typeface="Arial"/>
-              <a:buChar char="●"/>
-              <a:defRPr sz="1900" b="0" i="0" u="none" strike="noStrike" cap="none">
-                <a:solidFill>
-                  <a:srgbClr val="434343"/>
-                </a:solidFill>
-                <a:latin typeface="Arial"/>
-                <a:ea typeface="Arial"/>
-                <a:cs typeface="Arial"/>
-                <a:sym typeface="Arial"/>
-              </a:defRPr>
-            </a:lvl4pPr>
-            <a:lvl5pPr marL="2286000" marR="0" lvl="4" indent="-349250" algn="l" rtl="0">
-              <a:lnSpc>
-                <a:spcPct val="115000"/>
-              </a:lnSpc>
-              <a:spcBef>
-                <a:spcPts val="2100"/>
-              </a:spcBef>
-              <a:spcAft>
-                <a:spcPts val="0"/>
-              </a:spcAft>
-              <a:buClr>
-                <a:srgbClr val="434343"/>
-              </a:buClr>
-              <a:buSzPts val="1900"/>
-              <a:buFont typeface="Arial"/>
-              <a:buChar char="○"/>
-              <a:defRPr sz="1900" b="0" i="0" u="none" strike="noStrike" cap="none">
-                <a:solidFill>
-                  <a:srgbClr val="434343"/>
-                </a:solidFill>
-                <a:latin typeface="Arial"/>
-                <a:ea typeface="Arial"/>
-                <a:cs typeface="Arial"/>
-                <a:sym typeface="Arial"/>
-              </a:defRPr>
-            </a:lvl5pPr>
-            <a:lvl6pPr marL="2743200" marR="0" lvl="5" indent="-349250" algn="l" rtl="0">
-              <a:lnSpc>
-                <a:spcPct val="115000"/>
-              </a:lnSpc>
-              <a:spcBef>
-                <a:spcPts val="2100"/>
-              </a:spcBef>
-              <a:spcAft>
-                <a:spcPts val="0"/>
-              </a:spcAft>
-              <a:buClr>
-                <a:srgbClr val="434343"/>
-              </a:buClr>
-              <a:buSzPts val="1900"/>
-              <a:buFont typeface="Arial"/>
-              <a:buChar char="■"/>
-              <a:defRPr sz="1900" b="0" i="0" u="none" strike="noStrike" cap="none">
-                <a:solidFill>
-                  <a:srgbClr val="434343"/>
-                </a:solidFill>
-                <a:latin typeface="Arial"/>
-                <a:ea typeface="Arial"/>
-                <a:cs typeface="Arial"/>
-                <a:sym typeface="Arial"/>
-              </a:defRPr>
-            </a:lvl6pPr>
-            <a:lvl7pPr marL="3200400" marR="0" lvl="6" indent="-349250" algn="l" rtl="0">
-              <a:lnSpc>
-                <a:spcPct val="115000"/>
-              </a:lnSpc>
-              <a:spcBef>
-                <a:spcPts val="2100"/>
-              </a:spcBef>
-              <a:spcAft>
-                <a:spcPts val="0"/>
-              </a:spcAft>
-              <a:buClr>
-                <a:srgbClr val="434343"/>
-              </a:buClr>
-              <a:buSzPts val="1900"/>
-              <a:buFont typeface="Arial"/>
-              <a:buChar char="●"/>
-              <a:defRPr sz="1900" b="0" i="0" u="none" strike="noStrike" cap="none">
-                <a:solidFill>
-                  <a:srgbClr val="434343"/>
-                </a:solidFill>
-                <a:latin typeface="Arial"/>
-                <a:ea typeface="Arial"/>
-                <a:cs typeface="Arial"/>
-                <a:sym typeface="Arial"/>
-              </a:defRPr>
-            </a:lvl7pPr>
-            <a:lvl8pPr marL="3657600" marR="0" lvl="7" indent="-349250" algn="l" rtl="0">
-              <a:lnSpc>
-                <a:spcPct val="115000"/>
-              </a:lnSpc>
-              <a:spcBef>
-                <a:spcPts val="2100"/>
-              </a:spcBef>
-              <a:spcAft>
-                <a:spcPts val="0"/>
-              </a:spcAft>
-              <a:buClr>
-                <a:srgbClr val="434343"/>
-              </a:buClr>
-              <a:buSzPts val="1900"/>
-              <a:buFont typeface="Arial"/>
-              <a:buChar char="○"/>
-              <a:defRPr sz="1900" b="0" i="0" u="none" strike="noStrike" cap="none">
-                <a:solidFill>
-                  <a:srgbClr val="434343"/>
-                </a:solidFill>
-                <a:latin typeface="Arial"/>
-                <a:ea typeface="Arial"/>
-                <a:cs typeface="Arial"/>
-                <a:sym typeface="Arial"/>
-              </a:defRPr>
-            </a:lvl8pPr>
-            <a:lvl9pPr marL="4114800" marR="0" lvl="8" indent="-349250" algn="l" rtl="0">
-              <a:lnSpc>
-                <a:spcPct val="115000"/>
-              </a:lnSpc>
-              <a:spcBef>
-                <a:spcPts val="2100"/>
-              </a:spcBef>
-              <a:spcAft>
-                <a:spcPts val="2100"/>
-              </a:spcAft>
-              <a:buClr>
-                <a:srgbClr val="434343"/>
-              </a:buClr>
-              <a:buSzPts val="1900"/>
-              <a:buFont typeface="Arial"/>
-              <a:buChar char="■"/>
-              <a:defRPr sz="1900" b="0" i="0" u="none" strike="noStrike" cap="none">
-                <a:solidFill>
-                  <a:srgbClr val="434343"/>
-                </a:solidFill>
-                <a:latin typeface="Arial"/>
-                <a:ea typeface="Arial"/>
-                <a:cs typeface="Arial"/>
-                <a:sym typeface="Arial"/>
-              </a:defRPr>
-            </a:lvl9pPr>
-          </a:lstStyle>
-          <a:p>
-            <a:pPr marL="114300" indent="0" algn="ctr">
-              <a:buFont typeface="Arial"/>
-              <a:buNone/>
-            </a:pPr>
-            <a:r>
-              <a:rPr lang="en-US" sz="4800" dirty="0" err="1"/>
-              <a:t>sli.do</a:t>
-            </a:r>
-            <a:r>
-              <a:rPr lang="en-US" sz="4800" dirty="0"/>
-              <a:t>      #94889</a:t>
-            </a:r>
-          </a:p>
-          <a:p>
-            <a:pPr algn="ctr"/>
-            <a:endParaRPr lang="en-US" sz="4800" dirty="0"/>
-          </a:p>
-          <a:p>
-            <a:pPr marL="114300" indent="0" algn="ctr">
-              <a:buFont typeface="Arial"/>
-              <a:buNone/>
-            </a:pPr>
-            <a:r>
-              <a:rPr lang="en-US" sz="4800" dirty="0" err="1"/>
-              <a:t>sli.do</a:t>
-            </a:r>
-            <a:r>
-              <a:rPr lang="en-US" sz="4800" dirty="0"/>
-              <a:t>/94889</a:t>
-            </a:r>
-          </a:p>
-        </p:txBody>
-      </p:sp>
-    </p:spTree>
-    <p:extLst>
-      <p:ext uri="{BB962C8B-B14F-4D97-AF65-F5344CB8AC3E}">
-        <p14:creationId xmlns:p14="http://schemas.microsoft.com/office/powerpoint/2010/main" val="4066479944"/>
-      </p:ext>
-    </p:extLst>
-  </p:cSld>
-  <p:clrMapOvr>
-    <a:masterClrMapping/>
-  </p:clrMapOvr>
-</p:sld>
-</file>
-
-<file path=ppt/slides/slide20.xml><?xml version="1.0" encoding="utf-8"?>
+<file path=ppt/slides/slide18.xml><?xml version="1.0" encoding="utf-8"?>
 <p:sld xmlns:a="http://schemas.openxmlformats.org/drawingml/2006/main" xmlns:r="http://schemas.openxmlformats.org/officeDocument/2006/relationships" xmlns:p="http://schemas.openxmlformats.org/presentationml/2006/main">
   <p:cSld>
     <p:spTree>
@@ -14984,7 +14342,7 @@
 </p:sld>
 </file>
 
-<file path=ppt/slides/slide21.xml><?xml version="1.0" encoding="utf-8"?>
+<file path=ppt/slides/slide19.xml><?xml version="1.0" encoding="utf-8"?>
 <p:sld xmlns:a="http://schemas.openxmlformats.org/drawingml/2006/main" xmlns:r="http://schemas.openxmlformats.org/officeDocument/2006/relationships" xmlns:p="http://schemas.openxmlformats.org/presentationml/2006/main">
   <p:cSld>
     <p:spTree>
@@ -15094,7 +14452,138 @@
 </p:sld>
 </file>
 
-<file path=ppt/slides/slide22.xml><?xml version="1.0" encoding="utf-8"?>
+<file path=ppt/slides/slide2.xml><?xml version="1.0" encoding="utf-8"?>
+<p:sld xmlns:a="http://schemas.openxmlformats.org/drawingml/2006/main" xmlns:r="http://schemas.openxmlformats.org/officeDocument/2006/relationships" xmlns:p="http://schemas.openxmlformats.org/presentationml/2006/main">
+  <p:cSld>
+    <p:spTree>
+      <p:nvGrpSpPr>
+        <p:cNvPr id="1" name=""/>
+        <p:cNvGrpSpPr/>
+        <p:nvPr/>
+      </p:nvGrpSpPr>
+      <p:grpSpPr>
+        <a:xfrm>
+          <a:off x="0" y="0"/>
+          <a:ext cx="0" cy="0"/>
+          <a:chOff x="0" y="0"/>
+          <a:chExt cx="0" cy="0"/>
+        </a:xfrm>
+      </p:grpSpPr>
+      <p:sp>
+        <p:nvSpPr>
+          <p:cNvPr id="3" name="Title 2">
+            <a:extLst>
+              <a:ext uri="{FF2B5EF4-FFF2-40B4-BE49-F238E27FC236}">
+                <a16:creationId xmlns:a16="http://schemas.microsoft.com/office/drawing/2014/main" id="{9323871C-7CA8-1448-8FFC-1AE6E1838941}"/>
+              </a:ext>
+            </a:extLst>
+          </p:cNvPr>
+          <p:cNvSpPr>
+            <a:spLocks noGrp="1"/>
+          </p:cNvSpPr>
+          <p:nvPr>
+            <p:ph type="title"/>
+          </p:nvPr>
+        </p:nvSpPr>
+        <p:spPr/>
+        <p:txBody>
+          <a:bodyPr/>
+          <a:lstStyle/>
+          <a:p>
+            <a:r>
+              <a:rPr lang="en-US" dirty="0"/>
+              <a:t>Reminders</a:t>
+            </a:r>
+          </a:p>
+        </p:txBody>
+      </p:sp>
+      <p:sp>
+        <p:nvSpPr>
+          <p:cNvPr id="5" name="Text Placeholder 4">
+            <a:extLst>
+              <a:ext uri="{FF2B5EF4-FFF2-40B4-BE49-F238E27FC236}">
+                <a16:creationId xmlns:a16="http://schemas.microsoft.com/office/drawing/2014/main" id="{F4E0A5F0-1D89-954D-91FB-596CD9E690F2}"/>
+              </a:ext>
+            </a:extLst>
+          </p:cNvPr>
+          <p:cNvSpPr>
+            <a:spLocks noGrp="1"/>
+          </p:cNvSpPr>
+          <p:nvPr>
+            <p:ph type="body" idx="1"/>
+          </p:nvPr>
+        </p:nvSpPr>
+        <p:spPr>
+          <a:xfrm>
+            <a:off x="415600" y="1536632"/>
+            <a:ext cx="11360700" cy="4963021"/>
+          </a:xfrm>
+        </p:spPr>
+        <p:txBody>
+          <a:bodyPr/>
+          <a:lstStyle/>
+          <a:p>
+            <a:pPr marL="76200" indent="0">
+              <a:buNone/>
+            </a:pPr>
+            <a:r>
+              <a:rPr lang="en-US" b="1" dirty="0"/>
+              <a:t>This week:</a:t>
+            </a:r>
+            <a:endParaRPr lang="en-US" dirty="0"/>
+          </a:p>
+          <a:p>
+            <a:r>
+              <a:rPr lang="en-US" dirty="0"/>
+              <a:t>Friday: Triage Tech Session</a:t>
+            </a:r>
+          </a:p>
+          <a:p>
+            <a:endParaRPr lang="en-US" dirty="0"/>
+          </a:p>
+          <a:p>
+            <a:pPr marL="76200" indent="0">
+              <a:buNone/>
+            </a:pPr>
+            <a:r>
+              <a:rPr lang="en-US" b="1" dirty="0"/>
+              <a:t>Coming up next week:</a:t>
+            </a:r>
+          </a:p>
+          <a:p>
+            <a:r>
+              <a:rPr lang="en-US" dirty="0"/>
+              <a:t>Reading for Tuesday (“cross-validation” strategies)</a:t>
+            </a:r>
+          </a:p>
+          <a:p>
+            <a:r>
+              <a:rPr lang="en-US" dirty="0"/>
+              <a:t>Project check-in </a:t>
+            </a:r>
+          </a:p>
+          <a:p>
+            <a:r>
+              <a:rPr lang="en-US" dirty="0"/>
+              <a:t>First Project Assignment due Monday – posted on Canvas</a:t>
+            </a:r>
+          </a:p>
+        </p:txBody>
+      </p:sp>
+    </p:spTree>
+    <p:extLst>
+      <p:ext uri="{BB962C8B-B14F-4D97-AF65-F5344CB8AC3E}">
+        <p14:creationId xmlns:p14="http://schemas.microsoft.com/office/powerpoint/2010/main" val="186046226"/>
+      </p:ext>
+    </p:extLst>
+  </p:cSld>
+  <p:clrMapOvr>
+    <a:masterClrMapping/>
+  </p:clrMapOvr>
+</p:sld>
+</file>
+
+<file path=ppt/slides/slide20.xml><?xml version="1.0" encoding="utf-8"?>
 <p:sld xmlns:a="http://schemas.openxmlformats.org/drawingml/2006/main" xmlns:r="http://schemas.openxmlformats.org/officeDocument/2006/relationships" xmlns:p="http://schemas.openxmlformats.org/presentationml/2006/main">
   <p:cSld>
     <p:spTree>
@@ -15344,7 +14833,7 @@
 </p:sld>
 </file>
 
-<file path=ppt/slides/slide23.xml><?xml version="1.0" encoding="utf-8"?>
+<file path=ppt/slides/slide21.xml><?xml version="1.0" encoding="utf-8"?>
 <p:sld xmlns:a="http://schemas.openxmlformats.org/drawingml/2006/main" xmlns:r="http://schemas.openxmlformats.org/officeDocument/2006/relationships" xmlns:p="http://schemas.openxmlformats.org/presentationml/2006/main">
   <p:cSld>
     <p:spTree>
@@ -15432,7 +14921,7 @@
 </p:sld>
 </file>
 
-<file path=ppt/slides/slide24.xml><?xml version="1.0" encoding="utf-8"?>
+<file path=ppt/slides/slide22.xml><?xml version="1.0" encoding="utf-8"?>
 <p:sld xmlns:a="http://schemas.openxmlformats.org/drawingml/2006/main" xmlns:r="http://schemas.openxmlformats.org/officeDocument/2006/relationships" xmlns:p="http://schemas.openxmlformats.org/presentationml/2006/main">
   <p:cSld>
     <p:spTree>
@@ -15541,7 +15030,7 @@
 </p:sld>
 </file>
 
-<file path=ppt/slides/slide25.xml><?xml version="1.0" encoding="utf-8"?>
+<file path=ppt/slides/slide23.xml><?xml version="1.0" encoding="utf-8"?>
 <p:sld xmlns:a="http://schemas.openxmlformats.org/drawingml/2006/main" xmlns:r="http://schemas.openxmlformats.org/officeDocument/2006/relationships" xmlns:p="http://schemas.openxmlformats.org/presentationml/2006/main" show="0">
   <p:cSld>
     <p:spTree>
@@ -15623,7 +15112,90 @@
 </p:sld>
 </file>
 
-<file path=ppt/slides/slide26.xml><?xml version="1.0" encoding="utf-8"?>
+<file path=ppt/slides/slide24.xml><?xml version="1.0" encoding="utf-8"?>
+<p:sld xmlns:a="http://schemas.openxmlformats.org/drawingml/2006/main" xmlns:r="http://schemas.openxmlformats.org/officeDocument/2006/relationships" xmlns:p="http://schemas.openxmlformats.org/presentationml/2006/main">
+  <p:cSld>
+    <p:spTree>
+      <p:nvGrpSpPr>
+        <p:cNvPr id="1" name=""/>
+        <p:cNvGrpSpPr/>
+        <p:nvPr/>
+      </p:nvGrpSpPr>
+      <p:grpSpPr>
+        <a:xfrm>
+          <a:off x="0" y="0"/>
+          <a:ext cx="0" cy="0"/>
+          <a:chOff x="0" y="0"/>
+          <a:chExt cx="0" cy="0"/>
+        </a:xfrm>
+      </p:grpSpPr>
+      <p:sp>
+        <p:nvSpPr>
+          <p:cNvPr id="2" name="Title 1">
+            <a:extLst>
+              <a:ext uri="{FF2B5EF4-FFF2-40B4-BE49-F238E27FC236}">
+                <a16:creationId xmlns:a16="http://schemas.microsoft.com/office/drawing/2014/main" id="{71F04351-957A-E92A-2B2F-7938108E3ED6}"/>
+              </a:ext>
+            </a:extLst>
+          </p:cNvPr>
+          <p:cNvSpPr>
+            <a:spLocks noGrp="1"/>
+          </p:cNvSpPr>
+          <p:nvPr>
+            <p:ph type="title"/>
+          </p:nvPr>
+        </p:nvSpPr>
+        <p:spPr/>
+        <p:txBody>
+          <a:bodyPr/>
+          <a:lstStyle/>
+          <a:p>
+            <a:r>
+              <a:rPr lang="en-US" dirty="0"/>
+              <a:t>Metric Derivation</a:t>
+            </a:r>
+          </a:p>
+        </p:txBody>
+      </p:sp>
+      <p:sp>
+        <p:nvSpPr>
+          <p:cNvPr id="3" name="Text Placeholder 2">
+            <a:extLst>
+              <a:ext uri="{FF2B5EF4-FFF2-40B4-BE49-F238E27FC236}">
+                <a16:creationId xmlns:a16="http://schemas.microsoft.com/office/drawing/2014/main" id="{D2D2B9A7-154D-A2F7-9D54-3C71D83BEDF0}"/>
+              </a:ext>
+            </a:extLst>
+          </p:cNvPr>
+          <p:cNvSpPr>
+            <a:spLocks noGrp="1"/>
+          </p:cNvSpPr>
+          <p:nvPr>
+            <p:ph type="body" idx="1"/>
+          </p:nvPr>
+        </p:nvSpPr>
+        <p:spPr/>
+        <p:txBody>
+          <a:bodyPr/>
+          <a:lstStyle/>
+          <a:p>
+            <a:endParaRPr lang="en-US"/>
+          </a:p>
+        </p:txBody>
+      </p:sp>
+    </p:spTree>
+    <p:extLst>
+      <p:ext uri="{BB962C8B-B14F-4D97-AF65-F5344CB8AC3E}">
+        <p14:creationId xmlns:p14="http://schemas.microsoft.com/office/powerpoint/2010/main" val="40998621"/>
+      </p:ext>
+    </p:extLst>
+  </p:cSld>
+  <p:clrMapOvr>
+    <a:masterClrMapping/>
+  </p:clrMapOvr>
+</p:sld>
+</file>
+
+<file path=ppt/slides/slide25.xml><?xml version="1.0" encoding="utf-8"?>
 <p:sld xmlns:a="http://schemas.openxmlformats.org/drawingml/2006/main" xmlns:r="http://schemas.openxmlformats.org/officeDocument/2006/relationships" xmlns:p="http://schemas.openxmlformats.org/presentationml/2006/main">
   <p:cSld>
     <p:spTree>
@@ -15712,7 +15284,7 @@
 </p:sld>
 </file>
 
-<file path=ppt/slides/slide27.xml><?xml version="1.0" encoding="utf-8"?>
+<file path=ppt/slides/slide26.xml><?xml version="1.0" encoding="utf-8"?>
 <p:sld xmlns:a="http://schemas.openxmlformats.org/drawingml/2006/main" xmlns:r="http://schemas.openxmlformats.org/officeDocument/2006/relationships" xmlns:p="http://schemas.openxmlformats.org/presentationml/2006/main">
   <p:cSld>
     <p:spTree>
@@ -15720,7 +15292,7 @@
         <p:cNvPr id="1" name="">
           <a:extLst>
             <a:ext uri="{FF2B5EF4-FFF2-40B4-BE49-F238E27FC236}">
-              <a16:creationId xmlns:a16="http://schemas.microsoft.com/office/drawing/2014/main" id="{C8FBA3ED-4F96-7092-79E2-21BC748AF12A}"/>
+              <a16:creationId xmlns:a16="http://schemas.microsoft.com/office/drawing/2014/main" id="{F7BEBBB8-AC33-4D45-F26B-BAD910BE04F9}"/>
             </a:ext>
           </a:extLst>
         </p:cNvPr>
@@ -15740,7 +15312,7 @@
           <p:cNvPr id="3" name="Title 2">
             <a:extLst>
               <a:ext uri="{FF2B5EF4-FFF2-40B4-BE49-F238E27FC236}">
-                <a16:creationId xmlns:a16="http://schemas.microsoft.com/office/drawing/2014/main" id="{F326007A-1547-043A-D00C-D2203F256842}"/>
+                <a16:creationId xmlns:a16="http://schemas.microsoft.com/office/drawing/2014/main" id="{D45A83E3-24E9-89F2-6127-B1972287DB7E}"/>
               </a:ext>
             </a:extLst>
           </p:cNvPr>
@@ -15768,7 +15340,7 @@
           <p:cNvPr id="5" name="Text Placeholder 4">
             <a:extLst>
               <a:ext uri="{FF2B5EF4-FFF2-40B4-BE49-F238E27FC236}">
-                <a16:creationId xmlns:a16="http://schemas.microsoft.com/office/drawing/2014/main" id="{85039F8E-14E2-2202-7ECC-ACF2548A0001}"/>
+                <a16:creationId xmlns:a16="http://schemas.microsoft.com/office/drawing/2014/main" id="{4878835E-F3BC-0861-F41B-64B445942A14}"/>
               </a:ext>
             </a:extLst>
           </p:cNvPr>
@@ -15801,25 +15373,10 @@
           <a:p>
             <a:r>
               <a:rPr lang="en-US" dirty="0"/>
-              <a:t>Today: Proposal Peer Reviews</a:t>
+              <a:t>Friday: Triage Tech Session</a:t>
             </a:r>
           </a:p>
           <a:p>
-            <a:r>
-              <a:rPr lang="en-US" dirty="0"/>
-              <a:t>Wednesday: Triage Tech Session</a:t>
-            </a:r>
-          </a:p>
-          <a:p>
-            <a:r>
-              <a:rPr lang="en-US" dirty="0"/>
-              <a:t>Thursday: Project Work Time (use feedback from proposals to update plan)</a:t>
-            </a:r>
-          </a:p>
-          <a:p>
-            <a:pPr marL="76200" indent="0">
-              <a:buNone/>
-            </a:pPr>
             <a:endParaRPr lang="en-US" dirty="0"/>
           </a:p>
           <a:p>
@@ -15840,7 +15397,7 @@
           <a:p>
             <a:r>
               <a:rPr lang="en-US" dirty="0"/>
-              <a:t>Project check-in on Wednesday (MCRT1, Bills3, Bills2, Bills1)</a:t>
+              <a:t>Project check-in </a:t>
             </a:r>
           </a:p>
           <a:p>
@@ -15854,7 +15411,7 @@
     </p:spTree>
     <p:extLst>
       <p:ext uri="{BB962C8B-B14F-4D97-AF65-F5344CB8AC3E}">
-        <p14:creationId xmlns:p14="http://schemas.microsoft.com/office/powerpoint/2010/main" val="1555097270"/>
+        <p14:creationId xmlns:p14="http://schemas.microsoft.com/office/powerpoint/2010/main" val="1789311518"/>
       </p:ext>
     </p:extLst>
   </p:cSld>
@@ -15865,677 +15422,6 @@
 </file>
 
 <file path=ppt/slides/slide3.xml><?xml version="1.0" encoding="utf-8"?>
-<p:sld xmlns:a="http://schemas.openxmlformats.org/drawingml/2006/main" xmlns:r="http://schemas.openxmlformats.org/officeDocument/2006/relationships" xmlns:p="http://schemas.openxmlformats.org/presentationml/2006/main" showMasterSp="0">
-  <p:cSld>
-    <p:bg>
-      <p:bgPr>
-        <a:solidFill>
-          <a:srgbClr val="FFFFFF"/>
-        </a:solidFill>
-        <a:effectLst/>
-      </p:bgPr>
-    </p:bg>
-    <p:spTree>
-      <p:nvGrpSpPr>
-        <p:cNvPr id="1" name=""/>
-        <p:cNvGrpSpPr/>
-        <p:nvPr/>
-      </p:nvGrpSpPr>
-      <p:grpSpPr>
-        <a:xfrm>
-          <a:off x="0" y="0"/>
-          <a:ext cx="0" cy="0"/>
-          <a:chOff x="0" y="0"/>
-          <a:chExt cx="0" cy="0"/>
-        </a:xfrm>
-      </p:grpSpPr>
-      <p:sp>
-        <p:nvSpPr>
-          <p:cNvPr id="2" name="Rectangle 1">
-            <a:extLst>
-              <a:ext uri="{FF2B5EF4-FFF2-40B4-BE49-F238E27FC236}">
-                <a16:creationId xmlns:a16="http://schemas.microsoft.com/office/drawing/2014/main" id="{2568A487-81A7-1019-AFE0-2417BAD1A382}"/>
-              </a:ext>
-            </a:extLst>
-          </p:cNvPr>
-          <p:cNvSpPr/>
-          <p:nvPr>
-            <p:custDataLst>
-              <p:tags r:id="rId2"/>
-            </p:custDataLst>
-          </p:nvPr>
-        </p:nvSpPr>
-        <p:spPr>
-          <a:xfrm>
-            <a:off x="444693" y="1742703"/>
-            <a:ext cx="2371696" cy="2371696"/>
-          </a:xfrm>
-          <a:prstGeom prst="rect">
-            <a:avLst/>
-          </a:prstGeom>
-          <a:blipFill>
-            <a:blip r:embed="rId5">
-              <a:extLst>
-                <a:ext uri="{96DAC541-7B7A-43D3-8B79-37D633B846F1}">
-                  <asvg:svgBlip xmlns:asvg="http://schemas.microsoft.com/office/drawing/2016/SVG/main" r:embed="rId6"/>
-                </a:ext>
-              </a:extLst>
-            </a:blip>
-            <a:stretch>
-              <a:fillRect/>
-            </a:stretch>
-          </a:blipFill>
-          <a:ln>
-            <a:solidFill>
-              <a:srgbClr val="FFFFFF"/>
-            </a:solidFill>
-          </a:ln>
-        </p:spPr>
-        <p:style>
-          <a:lnRef idx="2">
-            <a:schemeClr val="accent1">
-              <a:shade val="15000"/>
-            </a:schemeClr>
-          </a:lnRef>
-          <a:fillRef idx="1">
-            <a:schemeClr val="accent1"/>
-          </a:fillRef>
-          <a:effectRef idx="0">
-            <a:schemeClr val="accent1"/>
-          </a:effectRef>
-          <a:fontRef idx="minor">
-            <a:schemeClr val="lt1"/>
-          </a:fontRef>
-        </p:style>
-        <p:txBody>
-          <a:bodyPr rtlCol="0" anchor="ctr"/>
-          <a:lstStyle/>
-          <a:p>
-            <a:pPr algn="ctr"/>
-            <a:endParaRPr lang="en-US"/>
-          </a:p>
-        </p:txBody>
-      </p:sp>
-      <p:sp>
-        <p:nvSpPr>
-          <p:cNvPr id="3" name="Rectangle 2">
-            <a:extLst>
-              <a:ext uri="{FF2B5EF4-FFF2-40B4-BE49-F238E27FC236}">
-                <a16:creationId xmlns:a16="http://schemas.microsoft.com/office/drawing/2014/main" id="{7DEF6E98-20F6-4439-2397-98D76A8BCE31}"/>
-              </a:ext>
-            </a:extLst>
-          </p:cNvPr>
-          <p:cNvSpPr/>
-          <p:nvPr>
-            <p:custDataLst>
-              <p:tags r:id="rId3"/>
-            </p:custDataLst>
-          </p:nvPr>
-        </p:nvSpPr>
-        <p:spPr>
-          <a:xfrm>
-            <a:off x="3112851" y="1000897"/>
-            <a:ext cx="8486226" cy="3855308"/>
-          </a:xfrm>
-          <a:prstGeom prst="rect">
-            <a:avLst/>
-          </a:prstGeom>
-          <a:noFill/>
-          <a:ln w="25400" cap="flat" cmpd="sng" algn="ctr">
-            <a:solidFill>
-              <a:srgbClr val="FFFFFF"/>
-            </a:solidFill>
-            <a:prstDash val="solid"/>
-          </a:ln>
-          <a:effectLst/>
-          <a:extLst>
-            <a:ext uri="{909E8E84-426E-40DD-AFC4-6F175D3DCCD1}">
-              <a14:hiddenFill xmlns:a14="http://schemas.microsoft.com/office/drawing/2010/main">
-                <a:solidFill>
-                  <a:schemeClr val="accent1"/>
-                </a:solidFill>
-              </a14:hiddenFill>
-            </a:ext>
-          </a:extLst>
-        </p:spPr>
-        <p:style>
-          <a:lnRef idx="2">
-            <a:schemeClr val="accent1">
-              <a:shade val="15000"/>
-            </a:schemeClr>
-          </a:lnRef>
-          <a:fillRef idx="1">
-            <a:schemeClr val="accent1"/>
-          </a:fillRef>
-          <a:effectRef idx="0">
-            <a:schemeClr val="accent1"/>
-          </a:effectRef>
-          <a:fontRef idx="minor">
-            <a:schemeClr val="lt1"/>
-          </a:fontRef>
-        </p:style>
-        <p:txBody>
-          <a:bodyPr rtlCol="0" anchor="ctr"/>
-          <a:lstStyle/>
-          <a:p>
-            <a:r>
-              <a:rPr lang="en-US" sz="4000" b="1">
-                <a:solidFill>
-                  <a:srgbClr val="000000"/>
-                </a:solidFill>
-              </a:rPr>
-              <a:t>How’s teamwork going?</a:t>
-            </a:r>
-          </a:p>
-        </p:txBody>
-      </p:sp>
-      <p:sp>
-        <p:nvSpPr>
-          <p:cNvPr id="4" name="Rectangle 3">
-            <a:extLst>
-              <a:ext uri="{FF2B5EF4-FFF2-40B4-BE49-F238E27FC236}">
-                <a16:creationId xmlns:a16="http://schemas.microsoft.com/office/drawing/2014/main" id="{976DC84F-D1BC-506E-79C7-147BB5AD61CA}"/>
-              </a:ext>
-            </a:extLst>
-          </p:cNvPr>
-          <p:cNvSpPr/>
-          <p:nvPr/>
-        </p:nvSpPr>
-        <p:spPr>
-          <a:xfrm>
-            <a:off x="0" y="5820032"/>
-            <a:ext cx="12192001" cy="1037968"/>
-          </a:xfrm>
-          <a:prstGeom prst="rect">
-            <a:avLst/>
-          </a:prstGeom>
-          <a:solidFill>
-            <a:srgbClr val="198038"/>
-          </a:solidFill>
-          <a:ln w="25400" cap="flat" cmpd="sng" algn="ctr">
-            <a:noFill/>
-            <a:prstDash val="solid"/>
-          </a:ln>
-          <a:effectLst/>
-          <a:extLst>
-            <a:ext uri="{91240B29-F687-4F45-9708-019B960494DF}">
-              <a14:hiddenLine xmlns:a14="http://schemas.microsoft.com/office/drawing/2010/main" w="25400" cap="flat" cmpd="sng" algn="ctr">
-                <a:solidFill>
-                  <a:schemeClr val="accent1">
-                    <a:shade val="15000"/>
-                  </a:schemeClr>
-                </a:solidFill>
-                <a:prstDash val="solid"/>
-              </a14:hiddenLine>
-            </a:ext>
-          </a:extLst>
-        </p:spPr>
-        <p:style>
-          <a:lnRef idx="2">
-            <a:schemeClr val="accent1">
-              <a:shade val="15000"/>
-            </a:schemeClr>
-          </a:lnRef>
-          <a:fillRef idx="1">
-            <a:schemeClr val="accent1"/>
-          </a:fillRef>
-          <a:effectRef idx="0">
-            <a:schemeClr val="accent1"/>
-          </a:effectRef>
-          <a:fontRef idx="minor">
-            <a:schemeClr val="lt1"/>
-          </a:fontRef>
-        </p:style>
-        <p:txBody>
-          <a:bodyPr lIns="741155" tIns="259492" rIns="1852888" bIns="203886" rtlCol="0" anchor="ctr">
-            <a:normAutofit fontScale="85000" lnSpcReduction="10000"/>
-          </a:bodyPr>
-          <a:lstStyle/>
-          <a:p>
-            <a:r>
-              <a:rPr lang="en-US" sz="2600">
-                <a:solidFill>
-                  <a:srgbClr val="FFFFFF"/>
-                </a:solidFill>
-              </a:rPr>
-              <a:t>The </a:t>
-            </a:r>
-            <a:r>
-              <a:rPr lang="en-US" sz="2600">
-                <a:solidFill>
-                  <a:srgbClr val="FFFFFF"/>
-                </a:solidFill>
-                <a:hlinkClick r:id="rId7">
-                  <a:extLst>
-                    <a:ext uri="{A12FA001-AC4F-418D-AE19-62706E023703}">
-                      <ahyp:hlinkClr xmlns:ahyp="http://schemas.microsoft.com/office/drawing/2018/hyperlinkcolor" val="tx"/>
-                    </a:ext>
-                  </a:extLst>
-                </a:hlinkClick>
-              </a:rPr>
-              <a:t>Slido app</a:t>
-            </a:r>
-            <a:r>
-              <a:rPr lang="en-US" sz="2600">
-                <a:solidFill>
-                  <a:srgbClr val="FFFFFF"/>
-                </a:solidFill>
-              </a:rPr>
-              <a:t> must be installed on every computer you’re presenting from</a:t>
-            </a:r>
-          </a:p>
-        </p:txBody>
-      </p:sp>
-      <p:pic>
-        <p:nvPicPr>
-          <p:cNvPr id="6" name="Graphic 5">
-            <a:extLst>
-              <a:ext uri="{FF2B5EF4-FFF2-40B4-BE49-F238E27FC236}">
-                <a16:creationId xmlns:a16="http://schemas.microsoft.com/office/drawing/2014/main" id="{F50AD478-F073-CE0B-B55B-04A9E8F91AFB}"/>
-              </a:ext>
-            </a:extLst>
-          </p:cNvPr>
-          <p:cNvPicPr>
-            <a:picLocks/>
-          </p:cNvPicPr>
-          <p:nvPr/>
-        </p:nvPicPr>
-        <p:blipFill>
-          <a:blip r:embed="rId8">
-            <a:extLst>
-              <a:ext uri="{96DAC541-7B7A-43D3-8B79-37D633B846F1}">
-                <asvg:svgBlip xmlns:asvg="http://schemas.microsoft.com/office/drawing/2016/SVG/main" r:embed="rId9"/>
-              </a:ext>
-            </a:extLst>
-          </a:blip>
-          <a:stretch>
-            <a:fillRect/>
-          </a:stretch>
-        </p:blipFill>
-        <p:spPr>
-          <a:xfrm>
-            <a:off x="296462" y="6190785"/>
-            <a:ext cx="296462" cy="296462"/>
-          </a:xfrm>
-          <a:prstGeom prst="rect">
-            <a:avLst/>
-          </a:prstGeom>
-        </p:spPr>
-      </p:pic>
-      <p:sp>
-        <p:nvSpPr>
-          <p:cNvPr id="7" name="Trapezoid 6">
-            <a:extLst>
-              <a:ext uri="{FF2B5EF4-FFF2-40B4-BE49-F238E27FC236}">
-                <a16:creationId xmlns:a16="http://schemas.microsoft.com/office/drawing/2014/main" id="{071B9495-3EB7-217D-6AFF-833F1C31149E}"/>
-              </a:ext>
-            </a:extLst>
-          </p:cNvPr>
-          <p:cNvSpPr/>
-          <p:nvPr/>
-        </p:nvSpPr>
-        <p:spPr>
-          <a:xfrm rot="2700000">
-            <a:off x="9620371" y="514924"/>
-            <a:ext cx="3335198" cy="778213"/>
-          </a:xfrm>
-          <a:prstGeom prst="trapezoid">
-            <a:avLst>
-              <a:gd name="adj" fmla="val 100000"/>
-            </a:avLst>
-          </a:prstGeom>
-          <a:solidFill>
-            <a:srgbClr val="EDFAF2"/>
-          </a:solidFill>
-          <a:ln w="25400" cap="flat" cmpd="sng" algn="ctr">
-            <a:noFill/>
-            <a:prstDash val="solid"/>
-          </a:ln>
-          <a:effectLst/>
-          <a:extLst>
-            <a:ext uri="{91240B29-F687-4F45-9708-019B960494DF}">
-              <a14:hiddenLine xmlns:a14="http://schemas.microsoft.com/office/drawing/2010/main" w="25400" cap="flat" cmpd="sng" algn="ctr">
-                <a:solidFill>
-                  <a:schemeClr val="accent1">
-                    <a:shade val="15000"/>
-                  </a:schemeClr>
-                </a:solidFill>
-                <a:prstDash val="solid"/>
-              </a14:hiddenLine>
-            </a:ext>
-          </a:extLst>
-        </p:spPr>
-        <p:style>
-          <a:lnRef idx="2">
-            <a:schemeClr val="accent1">
-              <a:shade val="15000"/>
-            </a:schemeClr>
-          </a:lnRef>
-          <a:fillRef idx="1">
-            <a:schemeClr val="accent1"/>
-          </a:fillRef>
-          <a:effectRef idx="0">
-            <a:schemeClr val="accent1"/>
-          </a:effectRef>
-          <a:fontRef idx="minor">
-            <a:schemeClr val="lt1"/>
-          </a:fontRef>
-        </p:style>
-        <p:txBody>
-          <a:bodyPr tIns="0" bIns="0" rtlCol="0" anchor="t">
-            <a:normAutofit fontScale="70000" lnSpcReduction="20000"/>
-          </a:bodyPr>
-          <a:lstStyle/>
-          <a:p>
-            <a:pPr algn="ctr"/>
-            <a:r>
-              <a:rPr lang="en-US" sz="2600" b="1">
-                <a:solidFill>
-                  <a:srgbClr val="198038"/>
-                </a:solidFill>
-              </a:rPr>
-              <a:t>Do not edit
-</a:t>
-            </a:r>
-            <a:r>
-              <a:rPr lang="en-US" sz="2200">
-                <a:solidFill>
-                  <a:srgbClr val="198038"/>
-                </a:solidFill>
-                <a:hlinkClick r:id="rId10">
-                  <a:extLst>
-                    <a:ext uri="{A12FA001-AC4F-418D-AE19-62706E023703}">
-                      <ahyp:hlinkClr xmlns:ahyp="http://schemas.microsoft.com/office/drawing/2018/hyperlinkcolor" val="tx"/>
-                    </a:ext>
-                  </a:extLst>
-                </a:hlinkClick>
-              </a:rPr>
-              <a:t>How to change the design</a:t>
-            </a:r>
-            <a:endParaRPr lang="en-US" sz="2200">
-              <a:solidFill>
-                <a:srgbClr val="198038"/>
-              </a:solidFill>
-            </a:endParaRPr>
-          </a:p>
-        </p:txBody>
-      </p:sp>
-      <p:pic>
-        <p:nvPicPr>
-          <p:cNvPr id="9" name="Graphic 8">
-            <a:extLst>
-              <a:ext uri="{FF2B5EF4-FFF2-40B4-BE49-F238E27FC236}">
-                <a16:creationId xmlns:a16="http://schemas.microsoft.com/office/drawing/2014/main" id="{CC14A267-1264-FE74-504C-2E3D1AD0823F}"/>
-              </a:ext>
-            </a:extLst>
-          </p:cNvPr>
-          <p:cNvPicPr>
-            <a:picLocks/>
-          </p:cNvPicPr>
-          <p:nvPr/>
-        </p:nvPicPr>
-        <p:blipFill>
-          <a:blip r:embed="rId11">
-            <a:extLst>
-              <a:ext uri="{96DAC541-7B7A-43D3-8B79-37D633B846F1}">
-                <asvg:svgBlip xmlns:asvg="http://schemas.microsoft.com/office/drawing/2016/SVG/main" r:embed="rId12"/>
-              </a:ext>
-            </a:extLst>
-          </a:blip>
-          <a:stretch>
-            <a:fillRect/>
-          </a:stretch>
-        </p:blipFill>
-        <p:spPr>
-          <a:xfrm>
-            <a:off x="10746748" y="6153727"/>
-            <a:ext cx="1111733" cy="370578"/>
-          </a:xfrm>
-          <a:prstGeom prst="rect">
-            <a:avLst/>
-          </a:prstGeom>
-        </p:spPr>
-      </p:pic>
-    </p:spTree>
-    <p:custDataLst>
-      <p:tags r:id="rId1"/>
-    </p:custDataLst>
-    <p:extLst>
-      <p:ext uri="{BB962C8B-B14F-4D97-AF65-F5344CB8AC3E}">
-        <p14:creationId xmlns:p14="http://schemas.microsoft.com/office/powerpoint/2010/main" val="3537916137"/>
-      </p:ext>
-    </p:extLst>
-  </p:cSld>
-  <p:clrMapOvr>
-    <a:masterClrMapping/>
-  </p:clrMapOvr>
-  <p:timing>
-    <p:tnLst>
-      <p:par>
-        <p:cTn id="1" dur="indefinite" restart="never" nodeType="tmRoot">
-          <p:childTnLst>
-            <p:seq concurrent="1" nextAc="seek">
-              <p:cTn id="2" dur="indefinite" nodeType="mainSeq">
-                <p:childTnLst>
-                  <p:par>
-                    <p:cTn id="3" fill="hold">
-                      <p:stCondLst>
-                        <p:cond delay="indefinite"/>
-                      </p:stCondLst>
-                      <p:childTnLst>
-                        <p:par>
-                          <p:cTn id="4" fill="hold">
-                            <p:stCondLst>
-                              <p:cond delay="0"/>
-                            </p:stCondLst>
-                            <p:childTnLst>
-                              <p:par>
-                                <p:cTn id="5" presetID="26" presetClass="emph" presetSubtype="0" fill="hold" grpId="0" nodeType="clickEffect">
-                                  <p:stCondLst>
-                                    <p:cond delay="0"/>
-                                  </p:stCondLst>
-                                  <p:childTnLst>
-                                    <p:animEffect transition="out" filter="fade">
-                                      <p:cBhvr>
-                                        <p:cTn id="6" dur="50" tmFilter="0, 0; .2, .5; .8, .5; 1, 0"/>
-                                        <p:tgtEl>
-                                          <p:spTgt spid="3"/>
-                                        </p:tgtEl>
-                                      </p:cBhvr>
-                                    </p:animEffect>
-                                    <p:animScale>
-                                      <p:cBhvr>
-                                        <p:cTn id="7" dur="25" autoRev="1" fill="hold"/>
-                                        <p:tgtEl>
-                                          <p:spTgt spid="3"/>
-                                        </p:tgtEl>
-                                      </p:cBhvr>
-                                      <p:by x="105000" y="105000"/>
-                                    </p:animScale>
-                                  </p:childTnLst>
-                                </p:cTn>
-                              </p:par>
-                            </p:childTnLst>
-                          </p:cTn>
-                        </p:par>
-                      </p:childTnLst>
-                    </p:cTn>
-                  </p:par>
-                </p:childTnLst>
-              </p:cTn>
-              <p:prevCondLst>
-                <p:cond evt="onPrev" delay="0">
-                  <p:tgtEl>
-                    <p:sldTgt/>
-                  </p:tgtEl>
-                </p:cond>
-              </p:prevCondLst>
-              <p:nextCondLst>
-                <p:cond evt="onNext" delay="0">
-                  <p:tgtEl>
-                    <p:sldTgt/>
-                  </p:tgtEl>
-                </p:cond>
-              </p:nextCondLst>
-            </p:seq>
-          </p:childTnLst>
-        </p:cTn>
-      </p:par>
-    </p:tnLst>
-    <p:bldLst>
-      <p:bldP spid="3" grpId="0" animBg="1"/>
-    </p:bldLst>
-  </p:timing>
-</p:sld>
-</file>
-
-<file path=ppt/slides/slide4.xml><?xml version="1.0" encoding="utf-8"?>
-<p:sld xmlns:a="http://schemas.openxmlformats.org/drawingml/2006/main" xmlns:r="http://schemas.openxmlformats.org/officeDocument/2006/relationships" xmlns:p="http://schemas.openxmlformats.org/presentationml/2006/main">
-  <p:cSld>
-    <p:spTree>
-      <p:nvGrpSpPr>
-        <p:cNvPr id="1" name=""/>
-        <p:cNvGrpSpPr/>
-        <p:nvPr/>
-      </p:nvGrpSpPr>
-      <p:grpSpPr>
-        <a:xfrm>
-          <a:off x="0" y="0"/>
-          <a:ext cx="0" cy="0"/>
-          <a:chOff x="0" y="0"/>
-          <a:chExt cx="0" cy="0"/>
-        </a:xfrm>
-      </p:grpSpPr>
-      <p:sp>
-        <p:nvSpPr>
-          <p:cNvPr id="3" name="Title 2">
-            <a:extLst>
-              <a:ext uri="{FF2B5EF4-FFF2-40B4-BE49-F238E27FC236}">
-                <a16:creationId xmlns:a16="http://schemas.microsoft.com/office/drawing/2014/main" id="{9323871C-7CA8-1448-8FFC-1AE6E1838941}"/>
-              </a:ext>
-            </a:extLst>
-          </p:cNvPr>
-          <p:cNvSpPr>
-            <a:spLocks noGrp="1"/>
-          </p:cNvSpPr>
-          <p:nvPr>
-            <p:ph type="title"/>
-          </p:nvPr>
-        </p:nvSpPr>
-        <p:spPr/>
-        <p:txBody>
-          <a:bodyPr/>
-          <a:lstStyle/>
-          <a:p>
-            <a:r>
-              <a:rPr lang="en-US" dirty="0"/>
-              <a:t>Reminders</a:t>
-            </a:r>
-          </a:p>
-        </p:txBody>
-      </p:sp>
-      <p:sp>
-        <p:nvSpPr>
-          <p:cNvPr id="5" name="Text Placeholder 4">
-            <a:extLst>
-              <a:ext uri="{FF2B5EF4-FFF2-40B4-BE49-F238E27FC236}">
-                <a16:creationId xmlns:a16="http://schemas.microsoft.com/office/drawing/2014/main" id="{F4E0A5F0-1D89-954D-91FB-596CD9E690F2}"/>
-              </a:ext>
-            </a:extLst>
-          </p:cNvPr>
-          <p:cNvSpPr>
-            <a:spLocks noGrp="1"/>
-          </p:cNvSpPr>
-          <p:nvPr>
-            <p:ph type="body" idx="1"/>
-          </p:nvPr>
-        </p:nvSpPr>
-        <p:spPr>
-          <a:xfrm>
-            <a:off x="415600" y="1536632"/>
-            <a:ext cx="11360700" cy="4963021"/>
-          </a:xfrm>
-        </p:spPr>
-        <p:txBody>
-          <a:bodyPr/>
-          <a:lstStyle/>
-          <a:p>
-            <a:pPr marL="76200" indent="0">
-              <a:buNone/>
-            </a:pPr>
-            <a:r>
-              <a:rPr lang="en-US" b="1" dirty="0"/>
-              <a:t>This week:</a:t>
-            </a:r>
-            <a:endParaRPr lang="en-US" dirty="0"/>
-          </a:p>
-          <a:p>
-            <a:r>
-              <a:rPr lang="en-US" dirty="0"/>
-              <a:t>Today: Proposal Peer Reviews</a:t>
-            </a:r>
-          </a:p>
-          <a:p>
-            <a:r>
-              <a:rPr lang="en-US" dirty="0"/>
-              <a:t>Wednesday: Triage Tech Session</a:t>
-            </a:r>
-          </a:p>
-          <a:p>
-            <a:r>
-              <a:rPr lang="en-US" dirty="0"/>
-              <a:t>Thursday: Project Work Time (use feedback from proposals to update plan)</a:t>
-            </a:r>
-          </a:p>
-          <a:p>
-            <a:pPr marL="76200" indent="0">
-              <a:buNone/>
-            </a:pPr>
-            <a:endParaRPr lang="en-US" dirty="0"/>
-          </a:p>
-          <a:p>
-            <a:pPr marL="76200" indent="0">
-              <a:buNone/>
-            </a:pPr>
-            <a:r>
-              <a:rPr lang="en-US" b="1" dirty="0"/>
-              <a:t>Coming up next week:</a:t>
-            </a:r>
-          </a:p>
-          <a:p>
-            <a:r>
-              <a:rPr lang="en-US" dirty="0"/>
-              <a:t>Reading for Tuesday (“cross-validation” strategies)</a:t>
-            </a:r>
-          </a:p>
-          <a:p>
-            <a:r>
-              <a:rPr lang="en-US" dirty="0"/>
-              <a:t>Project check-in on Wednesday (MCRT1, Bills3, Bills2, Bills1)</a:t>
-            </a:r>
-          </a:p>
-          <a:p>
-            <a:r>
-              <a:rPr lang="en-US" dirty="0"/>
-              <a:t>First Project Assignment due Monday – posted on Canvas</a:t>
-            </a:r>
-          </a:p>
-        </p:txBody>
-      </p:sp>
-    </p:spTree>
-    <p:extLst>
-      <p:ext uri="{BB962C8B-B14F-4D97-AF65-F5344CB8AC3E}">
-        <p14:creationId xmlns:p14="http://schemas.microsoft.com/office/powerpoint/2010/main" val="186046226"/>
-      </p:ext>
-    </p:extLst>
-  </p:cSld>
-  <p:clrMapOvr>
-    <a:masterClrMapping/>
-  </p:clrMapOvr>
-</p:sld>
-</file>
-
-<file path=ppt/slides/slide5.xml><?xml version="1.0" encoding="utf-8"?>
 <p:sld xmlns:a="http://schemas.openxmlformats.org/drawingml/2006/main" xmlns:r="http://schemas.openxmlformats.org/officeDocument/2006/relationships" xmlns:p="http://schemas.openxmlformats.org/presentationml/2006/main">
   <p:cSld>
     <p:spTree>
@@ -16659,7 +15545,7 @@
             <a:pPr lvl="1"/>
             <a:r>
               <a:rPr lang="en-US" dirty="0"/>
-              <a:t>Exploring triage configuration and parameters</a:t>
+              <a:t>Learning triage configuration and parameters</a:t>
             </a:r>
           </a:p>
         </p:txBody>
@@ -16677,7 +15563,7 @@
 </p:sld>
 </file>
 
-<file path=ppt/slides/slide6.xml><?xml version="1.0" encoding="utf-8"?>
+<file path=ppt/slides/slide4.xml><?xml version="1.0" encoding="utf-8"?>
 <p:sld xmlns:a="http://schemas.openxmlformats.org/drawingml/2006/main" xmlns:r="http://schemas.openxmlformats.org/officeDocument/2006/relationships" xmlns:p="http://schemas.openxmlformats.org/presentationml/2006/main">
   <p:cSld>
     <p:spTree>
@@ -16806,7 +15692,7 @@
 </p:sld>
 </file>
 
-<file path=ppt/slides/slide7.xml><?xml version="1.0" encoding="utf-8"?>
+<file path=ppt/slides/slide5.xml><?xml version="1.0" encoding="utf-8"?>
 <p:sld xmlns:a="http://schemas.openxmlformats.org/drawingml/2006/main" xmlns:r="http://schemas.openxmlformats.org/officeDocument/2006/relationships" xmlns:p="http://schemas.openxmlformats.org/presentationml/2006/main">
   <p:cSld>
     <p:spTree>
@@ -16916,9 +15802,17 @@
 </p:sld>
 </file>
 
-<file path=ppt/slides/slide8.xml><?xml version="1.0" encoding="utf-8"?>
-<p:sld xmlns:a="http://schemas.openxmlformats.org/drawingml/2006/main" xmlns:r="http://schemas.openxmlformats.org/officeDocument/2006/relationships" xmlns:p="http://schemas.openxmlformats.org/presentationml/2006/main">
+<file path=ppt/slides/slide6.xml><?xml version="1.0" encoding="utf-8"?>
+<p:sld xmlns:a="http://schemas.openxmlformats.org/drawingml/2006/main" xmlns:r="http://schemas.openxmlformats.org/officeDocument/2006/relationships" xmlns:p="http://schemas.openxmlformats.org/presentationml/2006/main" showMasterSp="0">
   <p:cSld>
+    <p:bg>
+      <p:bgPr>
+        <a:solidFill>
+          <a:srgbClr val="1A1A1A"/>
+        </a:solidFill>
+        <a:effectLst/>
+      </p:bgPr>
+    </p:bg>
     <p:spTree>
       <p:nvGrpSpPr>
         <p:cNvPr id="1" name=""/>
@@ -16935,71 +15829,529 @@
       </p:grpSpPr>
       <p:sp>
         <p:nvSpPr>
-          <p:cNvPr id="2" name="Title 1">
+          <p:cNvPr id="2" name="Rectangle 1">
             <a:extLst>
               <a:ext uri="{FF2B5EF4-FFF2-40B4-BE49-F238E27FC236}">
-                <a16:creationId xmlns:a16="http://schemas.microsoft.com/office/drawing/2014/main" id="{7F65A4CE-AFDD-8742-9A6E-BE2092DF9AD0}"/>
+                <a16:creationId xmlns:a16="http://schemas.microsoft.com/office/drawing/2014/main" id="{97244920-81BC-BC71-07AF-471855A61920}"/>
               </a:ext>
             </a:extLst>
           </p:cNvPr>
-          <p:cNvSpPr>
-            <a:spLocks noGrp="1"/>
-          </p:cNvSpPr>
+          <p:cNvSpPr/>
           <p:nvPr>
-            <p:ph type="title"/>
+            <p:custDataLst>
+              <p:tags r:id="rId2"/>
+            </p:custDataLst>
           </p:nvPr>
         </p:nvSpPr>
-        <p:spPr/>
+        <p:spPr>
+          <a:xfrm>
+            <a:off x="444693" y="1742703"/>
+            <a:ext cx="2371696" cy="2371696"/>
+          </a:xfrm>
+          <a:prstGeom prst="rect">
+            <a:avLst/>
+          </a:prstGeom>
+          <a:blipFill>
+            <a:blip>
+              <a:extLst>
+                <a:ext uri="{96DAC541-7B7A-43D3-8B79-37D633B846F1}">
+                  <asvg:svgBlip xmlns:asvg="http://schemas.microsoft.com/office/drawing/2016/SVG/main" r:embed="rId7"/>
+                </a:ext>
+              </a:extLst>
+            </a:blip>
+            <a:stretch>
+              <a:fillRect/>
+            </a:stretch>
+          </a:blipFill>
+          <a:ln w="25400" cap="flat" cmpd="sng" algn="ctr">
+            <a:noFill/>
+            <a:prstDash val="solid"/>
+          </a:ln>
+          <a:effectLst/>
+          <a:extLst>
+            <a:ext uri="{91240B29-F687-4F45-9708-019B960494DF}">
+              <a14:hiddenLine xmlns:a14="http://schemas.microsoft.com/office/drawing/2010/main" w="25400" cap="flat" cmpd="sng" algn="ctr">
+                <a:solidFill>
+                  <a:srgbClr val="FFFFFF"/>
+                </a:solidFill>
+                <a:prstDash val="solid"/>
+              </a14:hiddenLine>
+            </a:ext>
+          </a:extLst>
+        </p:spPr>
+        <p:style>
+          <a:lnRef idx="2">
+            <a:schemeClr val="accent1">
+              <a:shade val="15000"/>
+            </a:schemeClr>
+          </a:lnRef>
+          <a:fillRef idx="1">
+            <a:schemeClr val="accent1"/>
+          </a:fillRef>
+          <a:effectRef idx="0">
+            <a:schemeClr val="accent1"/>
+          </a:effectRef>
+          <a:fontRef idx="minor">
+            <a:schemeClr val="lt1"/>
+          </a:fontRef>
+        </p:style>
         <p:txBody>
-          <a:bodyPr/>
+          <a:bodyPr rtlCol="0" anchor="ctr"/>
+          <a:lstStyle/>
+          <a:p>
+            <a:pPr algn="ctr"/>
+            <a:endParaRPr lang="en-US"/>
+          </a:p>
+        </p:txBody>
+      </p:sp>
+      <p:sp>
+        <p:nvSpPr>
+          <p:cNvPr id="3" name="Rectangle 2">
+            <a:extLst>
+              <a:ext uri="{FF2B5EF4-FFF2-40B4-BE49-F238E27FC236}">
+                <a16:creationId xmlns:a16="http://schemas.microsoft.com/office/drawing/2014/main" id="{826A7C6C-C94D-59FB-6EB5-6DE56B667439}"/>
+              </a:ext>
+            </a:extLst>
+          </p:cNvPr>
+          <p:cNvSpPr/>
+          <p:nvPr>
+            <p:custDataLst>
+              <p:tags r:id="rId3"/>
+            </p:custDataLst>
+          </p:nvPr>
+        </p:nvSpPr>
+        <p:spPr>
+          <a:xfrm>
+            <a:off x="3112851" y="1000897"/>
+            <a:ext cx="8486226" cy="3855308"/>
+          </a:xfrm>
+          <a:prstGeom prst="rect">
+            <a:avLst/>
+          </a:prstGeom>
+          <a:noFill/>
+          <a:ln w="25400" cap="flat" cmpd="sng" algn="ctr">
+            <a:noFill/>
+            <a:prstDash val="solid"/>
+          </a:ln>
+          <a:effectLst/>
+          <a:extLst>
+            <a:ext uri="{909E8E84-426E-40DD-AFC4-6F175D3DCCD1}">
+              <a14:hiddenFill xmlns:a14="http://schemas.microsoft.com/office/drawing/2010/main">
+                <a:solidFill>
+                  <a:schemeClr val="accent1"/>
+                </a:solidFill>
+              </a14:hiddenFill>
+            </a:ext>
+            <a:ext uri="{91240B29-F687-4F45-9708-019B960494DF}">
+              <a14:hiddenLine xmlns:a14="http://schemas.microsoft.com/office/drawing/2010/main" w="25400" cap="flat" cmpd="sng" algn="ctr">
+                <a:solidFill>
+                  <a:srgbClr val="FFFFFF"/>
+                </a:solidFill>
+                <a:prstDash val="solid"/>
+              </a14:hiddenLine>
+            </a:ext>
+          </a:extLst>
+        </p:spPr>
+        <p:style>
+          <a:lnRef idx="2">
+            <a:schemeClr val="accent1">
+              <a:shade val="15000"/>
+            </a:schemeClr>
+          </a:lnRef>
+          <a:fillRef idx="1">
+            <a:schemeClr val="accent1"/>
+          </a:fillRef>
+          <a:effectRef idx="0">
+            <a:schemeClr val="accent1"/>
+          </a:effectRef>
+          <a:fontRef idx="minor">
+            <a:schemeClr val="lt1"/>
+          </a:fontRef>
+        </p:style>
+        <p:txBody>
+          <a:bodyPr rtlCol="0" anchor="ctr"/>
           <a:lstStyle/>
           <a:p>
             <a:r>
-              <a:rPr lang="en-US" dirty="0"/>
-              <a:t>What is the goal of model selection?</a:t>
+              <a:rPr lang="en-US" sz="4000" b="1">
+                <a:solidFill>
+                  <a:srgbClr val="FFFFFF"/>
+                </a:solidFill>
+              </a:rPr>
+              <a:t>what does the best model supposed to be good at?</a:t>
             </a:r>
           </a:p>
         </p:txBody>
       </p:sp>
       <p:sp>
         <p:nvSpPr>
-          <p:cNvPr id="3" name="Text Placeholder 2">
+          <p:cNvPr id="4" name="Rectangle 3">
             <a:extLst>
               <a:ext uri="{FF2B5EF4-FFF2-40B4-BE49-F238E27FC236}">
-                <a16:creationId xmlns:a16="http://schemas.microsoft.com/office/drawing/2014/main" id="{8EDF1C4C-EA36-C547-9888-F6FE7818419A}"/>
+                <a16:creationId xmlns:a16="http://schemas.microsoft.com/office/drawing/2014/main" id="{1484EE88-32C3-7B71-F82B-7125190343DE}"/>
               </a:ext>
             </a:extLst>
           </p:cNvPr>
-          <p:cNvSpPr>
-            <a:spLocks noGrp="1"/>
-          </p:cNvSpPr>
+          <p:cNvSpPr/>
           <p:nvPr>
-            <p:ph type="body" idx="1"/>
+            <p:custDataLst>
+              <p:tags r:id="rId4"/>
+            </p:custDataLst>
           </p:nvPr>
         </p:nvSpPr>
-        <p:spPr/>
+        <p:spPr>
+          <a:xfrm>
+            <a:off x="0" y="5820032"/>
+            <a:ext cx="12192001" cy="1037968"/>
+          </a:xfrm>
+          <a:prstGeom prst="rect">
+            <a:avLst/>
+          </a:prstGeom>
+          <a:solidFill>
+            <a:srgbClr val="198038"/>
+          </a:solidFill>
+          <a:ln w="25400" cap="flat" cmpd="sng" algn="ctr">
+            <a:noFill/>
+            <a:prstDash val="solid"/>
+          </a:ln>
+          <a:effectLst/>
+          <a:extLst>
+            <a:ext uri="{91240B29-F687-4F45-9708-019B960494DF}">
+              <a14:hiddenLine xmlns:a14="http://schemas.microsoft.com/office/drawing/2010/main" w="25400" cap="flat" cmpd="sng" algn="ctr">
+                <a:solidFill>
+                  <a:schemeClr val="accent1">
+                    <a:shade val="15000"/>
+                  </a:schemeClr>
+                </a:solidFill>
+                <a:prstDash val="solid"/>
+              </a14:hiddenLine>
+            </a:ext>
+          </a:extLst>
+        </p:spPr>
+        <p:style>
+          <a:lnRef idx="2">
+            <a:schemeClr val="accent1">
+              <a:shade val="15000"/>
+            </a:schemeClr>
+          </a:lnRef>
+          <a:fillRef idx="1">
+            <a:schemeClr val="accent1"/>
+          </a:fillRef>
+          <a:effectRef idx="0">
+            <a:schemeClr val="accent1"/>
+          </a:effectRef>
+          <a:fontRef idx="minor">
+            <a:schemeClr val="lt1"/>
+          </a:fontRef>
+        </p:style>
         <p:txBody>
-          <a:bodyPr/>
+          <a:bodyPr lIns="741155" tIns="259492" rIns="1852888" bIns="203886" rtlCol="0" anchor="ctr">
+            <a:normAutofit fontScale="85000" lnSpcReduction="10000"/>
+          </a:bodyPr>
           <a:lstStyle/>
           <a:p>
-            <a:endParaRPr lang="en-US"/>
+            <a:r>
+              <a:rPr lang="en-US" sz="2600">
+                <a:solidFill>
+                  <a:srgbClr val="FFFFFF"/>
+                </a:solidFill>
+              </a:rPr>
+              <a:t>The </a:t>
+            </a:r>
+            <a:r>
+              <a:rPr lang="en-US" sz="2600">
+                <a:solidFill>
+                  <a:srgbClr val="FFFFFF"/>
+                </a:solidFill>
+                <a:hlinkClick r:id="rId8">
+                  <a:extLst>
+                    <a:ext uri="{A12FA001-AC4F-418D-AE19-62706E023703}">
+                      <ahyp:hlinkClr xmlns:ahyp="http://schemas.microsoft.com/office/drawing/2018/hyperlinkcolor" val="tx"/>
+                    </a:ext>
+                  </a:extLst>
+                </a:hlinkClick>
+              </a:rPr>
+              <a:t>Slido app</a:t>
+            </a:r>
+            <a:r>
+              <a:rPr lang="en-US" sz="2600">
+                <a:solidFill>
+                  <a:srgbClr val="FFFFFF"/>
+                </a:solidFill>
+              </a:rPr>
+              <a:t> must be installed on every computer you’re presenting from</a:t>
+            </a:r>
           </a:p>
         </p:txBody>
       </p:sp>
+      <p:pic>
+        <p:nvPicPr>
+          <p:cNvPr id="6" name="Graphic 5">
+            <a:extLst>
+              <a:ext uri="{FF2B5EF4-FFF2-40B4-BE49-F238E27FC236}">
+                <a16:creationId xmlns:a16="http://schemas.microsoft.com/office/drawing/2014/main" id="{EE6282CB-230D-8661-65C1-0768EDD5F746}"/>
+              </a:ext>
+            </a:extLst>
+          </p:cNvPr>
+          <p:cNvPicPr>
+            <a:picLocks/>
+          </p:cNvPicPr>
+          <p:nvPr/>
+        </p:nvPicPr>
+        <p:blipFill>
+          <a:blip>
+            <a:extLst>
+              <a:ext uri="{96DAC541-7B7A-43D3-8B79-37D633B846F1}">
+                <asvg:svgBlip xmlns:asvg="http://schemas.microsoft.com/office/drawing/2016/SVG/main" r:embed="rId9"/>
+              </a:ext>
+            </a:extLst>
+          </a:blip>
+          <a:stretch>
+            <a:fillRect/>
+          </a:stretch>
+        </p:blipFill>
+        <p:spPr>
+          <a:xfrm>
+            <a:off x="296462" y="6190785"/>
+            <a:ext cx="296462" cy="296462"/>
+          </a:xfrm>
+          <a:prstGeom prst="rect">
+            <a:avLst/>
+          </a:prstGeom>
+        </p:spPr>
+      </p:pic>
+      <p:sp>
+        <p:nvSpPr>
+          <p:cNvPr id="7" name="Trapezoid 6">
+            <a:extLst>
+              <a:ext uri="{FF2B5EF4-FFF2-40B4-BE49-F238E27FC236}">
+                <a16:creationId xmlns:a16="http://schemas.microsoft.com/office/drawing/2014/main" id="{463F93B7-9478-2532-76B4-8830BAD20094}"/>
+              </a:ext>
+            </a:extLst>
+          </p:cNvPr>
+          <p:cNvSpPr/>
+          <p:nvPr>
+            <p:custDataLst>
+              <p:tags r:id="rId5"/>
+            </p:custDataLst>
+          </p:nvPr>
+        </p:nvSpPr>
+        <p:spPr>
+          <a:xfrm rot="2700000">
+            <a:off x="9620371" y="514924"/>
+            <a:ext cx="3335198" cy="778213"/>
+          </a:xfrm>
+          <a:prstGeom prst="trapezoid">
+            <a:avLst>
+              <a:gd name="adj" fmla="val 100000"/>
+            </a:avLst>
+          </a:prstGeom>
+          <a:solidFill>
+            <a:srgbClr val="0A3316"/>
+          </a:solidFill>
+          <a:ln w="25400" cap="flat" cmpd="sng" algn="ctr">
+            <a:noFill/>
+            <a:prstDash val="solid"/>
+          </a:ln>
+          <a:effectLst/>
+          <a:extLst>
+            <a:ext uri="{91240B29-F687-4F45-9708-019B960494DF}">
+              <a14:hiddenLine xmlns:a14="http://schemas.microsoft.com/office/drawing/2010/main" w="25400" cap="flat" cmpd="sng" algn="ctr">
+                <a:solidFill>
+                  <a:schemeClr val="accent1">
+                    <a:shade val="15000"/>
+                  </a:schemeClr>
+                </a:solidFill>
+                <a:prstDash val="solid"/>
+              </a14:hiddenLine>
+            </a:ext>
+          </a:extLst>
+        </p:spPr>
+        <p:style>
+          <a:lnRef idx="2">
+            <a:schemeClr val="accent1">
+              <a:shade val="15000"/>
+            </a:schemeClr>
+          </a:lnRef>
+          <a:fillRef idx="1">
+            <a:schemeClr val="accent1"/>
+          </a:fillRef>
+          <a:effectRef idx="0">
+            <a:schemeClr val="accent1"/>
+          </a:effectRef>
+          <a:fontRef idx="minor">
+            <a:schemeClr val="lt1"/>
+          </a:fontRef>
+        </p:style>
+        <p:txBody>
+          <a:bodyPr tIns="0" bIns="0" rtlCol="0" anchor="t">
+            <a:normAutofit fontScale="70000" lnSpcReduction="20000"/>
+          </a:bodyPr>
+          <a:lstStyle/>
+          <a:p>
+            <a:pPr algn="ctr"/>
+            <a:r>
+              <a:rPr lang="en-US" sz="2600" b="1">
+                <a:solidFill>
+                  <a:srgbClr val="42A65F"/>
+                </a:solidFill>
+              </a:rPr>
+              <a:t>Do not edit
+</a:t>
+            </a:r>
+            <a:r>
+              <a:rPr lang="en-US" sz="2200">
+                <a:solidFill>
+                  <a:srgbClr val="42A65F"/>
+                </a:solidFill>
+                <a:hlinkClick r:id="rId10">
+                  <a:extLst>
+                    <a:ext uri="{A12FA001-AC4F-418D-AE19-62706E023703}">
+                      <ahyp:hlinkClr xmlns:ahyp="http://schemas.microsoft.com/office/drawing/2018/hyperlinkcolor" val="tx"/>
+                    </a:ext>
+                  </a:extLst>
+                </a:hlinkClick>
+              </a:rPr>
+              <a:t>How to change the design</a:t>
+            </a:r>
+            <a:endParaRPr lang="en-US" sz="2200">
+              <a:solidFill>
+                <a:srgbClr val="42A65F"/>
+              </a:solidFill>
+            </a:endParaRPr>
+          </a:p>
+        </p:txBody>
+      </p:sp>
+      <p:pic>
+        <p:nvPicPr>
+          <p:cNvPr id="9" name="Graphic 8">
+            <a:extLst>
+              <a:ext uri="{FF2B5EF4-FFF2-40B4-BE49-F238E27FC236}">
+                <a16:creationId xmlns:a16="http://schemas.microsoft.com/office/drawing/2014/main" id="{A533833D-656A-9164-3E9A-60E5492B5C2F}"/>
+              </a:ext>
+            </a:extLst>
+          </p:cNvPr>
+          <p:cNvPicPr>
+            <a:picLocks/>
+          </p:cNvPicPr>
+          <p:nvPr/>
+        </p:nvPicPr>
+        <p:blipFill>
+          <a:blip>
+            <a:extLst>
+              <a:ext uri="{96DAC541-7B7A-43D3-8B79-37D633B846F1}">
+                <asvg:svgBlip xmlns:asvg="http://schemas.microsoft.com/office/drawing/2016/SVG/main" r:embed="rId11"/>
+              </a:ext>
+            </a:extLst>
+          </a:blip>
+          <a:stretch>
+            <a:fillRect/>
+          </a:stretch>
+        </p:blipFill>
+        <p:spPr>
+          <a:xfrm>
+            <a:off x="10746748" y="6153727"/>
+            <a:ext cx="1111733" cy="370578"/>
+          </a:xfrm>
+          <a:prstGeom prst="rect">
+            <a:avLst/>
+          </a:prstGeom>
+        </p:spPr>
+      </p:pic>
     </p:spTree>
+    <p:custDataLst>
+      <p:tags r:id="rId1"/>
+    </p:custDataLst>
     <p:extLst>
       <p:ext uri="{BB962C8B-B14F-4D97-AF65-F5344CB8AC3E}">
-        <p14:creationId xmlns:p14="http://schemas.microsoft.com/office/powerpoint/2010/main" val="3250978397"/>
+        <p14:creationId xmlns:p14="http://schemas.microsoft.com/office/powerpoint/2010/main" val="1416060820"/>
       </p:ext>
     </p:extLst>
   </p:cSld>
   <p:clrMapOvr>
     <a:masterClrMapping/>
   </p:clrMapOvr>
+  <p:timing>
+    <p:tnLst>
+      <p:par>
+        <p:cTn id="1" dur="indefinite" restart="never" nodeType="tmRoot">
+          <p:childTnLst>
+            <p:seq concurrent="1" nextAc="seek">
+              <p:cTn id="2" dur="indefinite" nodeType="mainSeq">
+                <p:childTnLst>
+                  <p:par>
+                    <p:cTn id="3" fill="hold">
+                      <p:stCondLst>
+                        <p:cond delay="indefinite"/>
+                      </p:stCondLst>
+                      <p:childTnLst>
+                        <p:par>
+                          <p:cTn id="4" fill="hold">
+                            <p:stCondLst>
+                              <p:cond delay="0"/>
+                            </p:stCondLst>
+                            <p:childTnLst>
+                              <p:par>
+                                <p:cTn id="5" presetID="26" presetClass="emph" presetSubtype="0" fill="hold" grpId="0" nodeType="clickEffect">
+                                  <p:stCondLst>
+                                    <p:cond delay="0"/>
+                                  </p:stCondLst>
+                                  <p:childTnLst>
+                                    <p:animEffect transition="out" filter="fade">
+                                      <p:cBhvr>
+                                        <p:cTn id="6" dur="50" tmFilter="0, 0; .2, .5; .8, .5; 1, 0"/>
+                                        <p:tgtEl>
+                                          <p:spTgt spid="3"/>
+                                        </p:tgtEl>
+                                      </p:cBhvr>
+                                    </p:animEffect>
+                                    <p:animScale>
+                                      <p:cBhvr>
+                                        <p:cTn id="7" dur="25" autoRev="1" fill="hold"/>
+                                        <p:tgtEl>
+                                          <p:spTgt spid="3"/>
+                                        </p:tgtEl>
+                                      </p:cBhvr>
+                                      <p:by x="105000" y="105000"/>
+                                    </p:animScale>
+                                  </p:childTnLst>
+                                </p:cTn>
+                              </p:par>
+                            </p:childTnLst>
+                          </p:cTn>
+                        </p:par>
+                      </p:childTnLst>
+                    </p:cTn>
+                  </p:par>
+                </p:childTnLst>
+              </p:cTn>
+              <p:prevCondLst>
+                <p:cond evt="onPrev" delay="0">
+                  <p:tgtEl>
+                    <p:sldTgt/>
+                  </p:tgtEl>
+                </p:cond>
+              </p:prevCondLst>
+              <p:nextCondLst>
+                <p:cond evt="onNext" delay="0">
+                  <p:tgtEl>
+                    <p:sldTgt/>
+                  </p:tgtEl>
+                </p:cond>
+              </p:nextCondLst>
+            </p:seq>
+          </p:childTnLst>
+        </p:cTn>
+      </p:par>
+    </p:tnLst>
+    <p:bldLst>
+      <p:bldP spid="3" grpId="0"/>
+    </p:bldLst>
+  </p:timing>
 </p:sld>
 </file>
 
-<file path=ppt/slides/slide9.xml><?xml version="1.0" encoding="utf-8"?>
+<file path=ppt/slides/slide7.xml><?xml version="1.0" encoding="utf-8"?>
 <p:sld xmlns:a="http://schemas.openxmlformats.org/drawingml/2006/main" xmlns:r="http://schemas.openxmlformats.org/officeDocument/2006/relationships" xmlns:p="http://schemas.openxmlformats.org/presentationml/2006/main">
   <p:cSld>
     <p:spTree>
@@ -17099,27 +16451,262 @@
 </p:sld>
 </file>
 
+<file path=ppt/slides/slide8.xml><?xml version="1.0" encoding="utf-8"?>
+<p:sld xmlns:a="http://schemas.openxmlformats.org/drawingml/2006/main" xmlns:r="http://schemas.openxmlformats.org/officeDocument/2006/relationships" xmlns:p="http://schemas.openxmlformats.org/presentationml/2006/main">
+  <p:cSld>
+    <p:spTree>
+      <p:nvGrpSpPr>
+        <p:cNvPr id="1" name=""/>
+        <p:cNvGrpSpPr/>
+        <p:nvPr/>
+      </p:nvGrpSpPr>
+      <p:grpSpPr>
+        <a:xfrm>
+          <a:off x="0" y="0"/>
+          <a:ext cx="0" cy="0"/>
+          <a:chOff x="0" y="0"/>
+          <a:chExt cx="0" cy="0"/>
+        </a:xfrm>
+      </p:grpSpPr>
+      <p:sp>
+        <p:nvSpPr>
+          <p:cNvPr id="4" name="Title 3">
+            <a:extLst>
+              <a:ext uri="{FF2B5EF4-FFF2-40B4-BE49-F238E27FC236}">
+                <a16:creationId xmlns:a16="http://schemas.microsoft.com/office/drawing/2014/main" id="{30C2C959-72F2-EF4D-80DA-F48A29D0F3C4}"/>
+              </a:ext>
+            </a:extLst>
+          </p:cNvPr>
+          <p:cNvSpPr>
+            <a:spLocks noGrp="1"/>
+          </p:cNvSpPr>
+          <p:nvPr>
+            <p:ph type="title"/>
+          </p:nvPr>
+        </p:nvSpPr>
+        <p:spPr/>
+        <p:txBody>
+          <a:bodyPr/>
+          <a:lstStyle/>
+          <a:p>
+            <a:r>
+              <a:rPr lang="en-US" dirty="0"/>
+              <a:t>What do we need our selected model to do?</a:t>
+            </a:r>
+          </a:p>
+        </p:txBody>
+      </p:sp>
+      <p:sp>
+        <p:nvSpPr>
+          <p:cNvPr id="3" name="Text Placeholder 2">
+            <a:extLst>
+              <a:ext uri="{FF2B5EF4-FFF2-40B4-BE49-F238E27FC236}">
+                <a16:creationId xmlns:a16="http://schemas.microsoft.com/office/drawing/2014/main" id="{DA13BAFF-48B6-9046-94F3-CBF50B2F21D8}"/>
+              </a:ext>
+            </a:extLst>
+          </p:cNvPr>
+          <p:cNvSpPr>
+            <a:spLocks noGrp="1"/>
+          </p:cNvSpPr>
+          <p:nvPr>
+            <p:ph type="body" idx="1"/>
+          </p:nvPr>
+        </p:nvSpPr>
+        <p:spPr/>
+        <p:txBody>
+          <a:bodyPr/>
+          <a:lstStyle/>
+          <a:p>
+            <a:endParaRPr lang="en-US"/>
+          </a:p>
+        </p:txBody>
+      </p:sp>
+    </p:spTree>
+    <p:extLst>
+      <p:ext uri="{BB962C8B-B14F-4D97-AF65-F5344CB8AC3E}">
+        <p14:creationId xmlns:p14="http://schemas.microsoft.com/office/powerpoint/2010/main" val="106807354"/>
+      </p:ext>
+    </p:extLst>
+  </p:cSld>
+  <p:clrMapOvr>
+    <a:masterClrMapping/>
+  </p:clrMapOvr>
+  <mc:AlternateContent xmlns:mc="http://schemas.openxmlformats.org/markup-compatibility/2006" xmlns:p14="http://schemas.microsoft.com/office/powerpoint/2010/main">
+    <mc:Choice Requires="p14">
+      <p:transition spd="med" p14:dur="700">
+        <p:fade/>
+      </p:transition>
+    </mc:Choice>
+    <mc:Fallback xmlns="">
+      <p:transition spd="med">
+        <p:fade/>
+      </p:transition>
+    </mc:Fallback>
+  </mc:AlternateContent>
+</p:sld>
+</file>
+
+<file path=ppt/slides/slide9.xml><?xml version="1.0" encoding="utf-8"?>
+<p:sld xmlns:a="http://schemas.openxmlformats.org/drawingml/2006/main" xmlns:r="http://schemas.openxmlformats.org/officeDocument/2006/relationships" xmlns:p="http://schemas.openxmlformats.org/presentationml/2006/main">
+  <p:cSld>
+    <p:spTree>
+      <p:nvGrpSpPr>
+        <p:cNvPr id="1" name=""/>
+        <p:cNvGrpSpPr/>
+        <p:nvPr/>
+      </p:nvGrpSpPr>
+      <p:grpSpPr>
+        <a:xfrm>
+          <a:off x="0" y="0"/>
+          <a:ext cx="0" cy="0"/>
+          <a:chOff x="0" y="0"/>
+          <a:chExt cx="0" cy="0"/>
+        </a:xfrm>
+      </p:grpSpPr>
+      <p:sp>
+        <p:nvSpPr>
+          <p:cNvPr id="4" name="Title 3">
+            <a:extLst>
+              <a:ext uri="{FF2B5EF4-FFF2-40B4-BE49-F238E27FC236}">
+                <a16:creationId xmlns:a16="http://schemas.microsoft.com/office/drawing/2014/main" id="{30C2C959-72F2-EF4D-80DA-F48A29D0F3C4}"/>
+              </a:ext>
+            </a:extLst>
+          </p:cNvPr>
+          <p:cNvSpPr>
+            <a:spLocks noGrp="1"/>
+          </p:cNvSpPr>
+          <p:nvPr>
+            <p:ph type="title"/>
+          </p:nvPr>
+        </p:nvSpPr>
+        <p:spPr/>
+        <p:txBody>
+          <a:bodyPr/>
+          <a:lstStyle/>
+          <a:p>
+            <a:r>
+              <a:rPr lang="en-US" dirty="0"/>
+              <a:t>What do we need our selected model to do?</a:t>
+            </a:r>
+          </a:p>
+        </p:txBody>
+      </p:sp>
+      <p:sp>
+        <p:nvSpPr>
+          <p:cNvPr id="5" name="Text Placeholder 4">
+            <a:extLst>
+              <a:ext uri="{FF2B5EF4-FFF2-40B4-BE49-F238E27FC236}">
+                <a16:creationId xmlns:a16="http://schemas.microsoft.com/office/drawing/2014/main" id="{24A75FF1-9EFE-0F41-92F5-3E749CFB2EB5}"/>
+              </a:ext>
+            </a:extLst>
+          </p:cNvPr>
+          <p:cNvSpPr>
+            <a:spLocks noGrp="1"/>
+          </p:cNvSpPr>
+          <p:nvPr>
+            <p:ph type="body" idx="1"/>
+          </p:nvPr>
+        </p:nvSpPr>
+        <p:spPr/>
+        <p:txBody>
+          <a:bodyPr/>
+          <a:lstStyle/>
+          <a:p>
+            <a:r>
+              <a:rPr lang="en-US" dirty="0"/>
+              <a:t>Perform well</a:t>
+            </a:r>
+          </a:p>
+          <a:p>
+            <a:pPr lvl="1"/>
+            <a:r>
+              <a:rPr lang="en-US" dirty="0"/>
+              <a:t>What metric?</a:t>
+            </a:r>
+          </a:p>
+          <a:p>
+            <a:pPr lvl="1"/>
+            <a:r>
+              <a:rPr lang="en-US" dirty="0"/>
+              <a:t>Compared to what?</a:t>
+            </a:r>
+          </a:p>
+          <a:p>
+            <a:endParaRPr lang="en-US" dirty="0"/>
+          </a:p>
+          <a:p>
+            <a:r>
+              <a:rPr lang="en-US" dirty="0"/>
+              <a:t>Generalize</a:t>
+            </a:r>
+          </a:p>
+          <a:p>
+            <a:pPr lvl="1"/>
+            <a:r>
+              <a:rPr lang="en-US" dirty="0"/>
+              <a:t>To what?</a:t>
+            </a:r>
+          </a:p>
+        </p:txBody>
+      </p:sp>
+    </p:spTree>
+    <p:extLst>
+      <p:ext uri="{BB962C8B-B14F-4D97-AF65-F5344CB8AC3E}">
+        <p14:creationId xmlns:p14="http://schemas.microsoft.com/office/powerpoint/2010/main" val="4111643116"/>
+      </p:ext>
+    </p:extLst>
+  </p:cSld>
+  <p:clrMapOvr>
+    <a:masterClrMapping/>
+  </p:clrMapOvr>
+  <mc:AlternateContent xmlns:mc="http://schemas.openxmlformats.org/markup-compatibility/2006" xmlns:p14="http://schemas.microsoft.com/office/powerpoint/2010/main">
+    <mc:Choice Requires="p14">
+      <p:transition spd="med" p14:dur="700">
+        <p:fade/>
+      </p:transition>
+    </mc:Choice>
+    <mc:Fallback xmlns="">
+      <p:transition spd="med">
+        <p:fade/>
+      </p:transition>
+    </mc:Fallback>
+  </mc:AlternateContent>
+</p:sld>
+</file>
+
 <file path=ppt/tags/tag1.xml><?xml version="1.0" encoding="utf-8"?>
 <p:tagLst xmlns:a="http://schemas.openxmlformats.org/drawingml/2006/main" xmlns:r="http://schemas.openxmlformats.org/officeDocument/2006/relationships" xmlns:p="http://schemas.openxmlformats.org/presentationml/2006/main">
   <p:tag name="SLIDO_APP_VERSION" val="1.5.0.0"/>
   <p:tag name="SLIDO_PRESENTATION_ID" val="98cad32e-33fb-4e66-a4b6-33389b2cff9d"/>
-  <p:tag name="SLIDO_EVENT_UUID" val="606d3060-a568-4588-a241-3a97192e31fe"/>
-  <p:tag name="SLIDO_EVENT_SECTION_UUID" val="07e0abdb-b0f8-4b83-94f8-1a04124a2d9c"/>
+  <p:tag name="SLIDO_EVENT_UUID" val="4ee70ca1-e1e6-4271-9fce-4efcf7d701cb"/>
+  <p:tag name="SLIDO_EVENT_SECTION_UUID" val="4e6b9f65-e842-4d53-9e0b-c4f65d721159"/>
+</p:tagLst>
+</file>
+
+<file path=ppt/tags/tag10.xml><?xml version="1.0" encoding="utf-8"?>
+<p:tagLst xmlns:a="http://schemas.openxmlformats.org/drawingml/2006/main" xmlns:r="http://schemas.openxmlformats.org/officeDocument/2006/relationships" xmlns:p="http://schemas.openxmlformats.org/presentationml/2006/main">
+  <p:tag name="SLIDO_ELEMENT" val="footer"/>
+</p:tagLst>
+</file>
+
+<file path=ppt/tags/tag11.xml><?xml version="1.0" encoding="utf-8"?>
+<p:tagLst xmlns:a="http://schemas.openxmlformats.org/drawingml/2006/main" xmlns:r="http://schemas.openxmlformats.org/officeDocument/2006/relationships" xmlns:p="http://schemas.openxmlformats.org/presentationml/2006/main">
+  <p:tag name="SLIDO_ELEMENT" val="corner"/>
 </p:tagLst>
 </file>
 
 <file path=ppt/tags/tag2.xml><?xml version="1.0" encoding="utf-8"?>
 <p:tagLst xmlns:a="http://schemas.openxmlformats.org/drawingml/2006/main" xmlns:r="http://schemas.openxmlformats.org/officeDocument/2006/relationships" xmlns:p="http://schemas.openxmlformats.org/presentationml/2006/main">
   <p:tag name="SLIDO_TYPE" val="SlidoPoll"/>
-  <p:tag name="SLIDO_POLL_UUID" val="405e5638-c0da-405c-9d91-cd59fcf5047a"/>
-  <p:tag name="SLIDO_TIMELINE" val="W3sicG9sbFF1ZXN0aW9uVXVpZCI6IjQ0N2UyNDU5LTBlNGQtNDc0Yi1hMDAxLThjZGZmZDI2NDFkOCIsInNob3dSZXN1bHRzIjpmYWxzZX0seyJwb2xsUXVlc3Rpb25VdWlkIjoiNDQ3ZTI0NTktMGU0ZC00NzRiLWEwMDEtOGNkZmZkMjY0MWQ4Iiwic2hvd1Jlc3VsdHMiOnRydWV9XQ=="/>
+  <p:tag name="SLIDO_POLL_UUID" val="62977c29-9d6c-411a-ad5e-874ad6541b25"/>
+  <p:tag name="SLIDO_TIMELINE" val="W3sicG9sbFF1ZXN0aW9uVXVpZCI6IjY0ZTJlYTEwLTU3MDctNGY1MS1hOGY0LWQ0YzExM2I1NDUxMyIsInNob3dSZXN1bHRzIjpmYWxzZX0seyJwb2xsUXVlc3Rpb25VdWlkIjoiNjRlMmVhMTAtNTcwNy00ZjUxLWE4ZjQtZDRjMTEzYjU0NTEzIiwic2hvd1Jlc3VsdHMiOnRydWV9XQ=="/>
 </p:tagLst>
 </file>
 
 <file path=ppt/tags/tag3.xml><?xml version="1.0" encoding="utf-8"?>
 <p:tagLst xmlns:a="http://schemas.openxmlformats.org/drawingml/2006/main" xmlns:r="http://schemas.openxmlformats.org/officeDocument/2006/relationships" xmlns:p="http://schemas.openxmlformats.org/presentationml/2006/main">
   <p:tag name="SLIDO_ELEMENT" val="interaction_image"/>
-  <p:tag name="INTERACTION_TYPE" val="MultipleChoice"/>
+  <p:tag name="INTERACTION_TYPE" val="OpenText"/>
 </p:tagLst>
 </file>
 
@@ -17131,20 +16718,32 @@
 
 <file path=ppt/tags/tag5.xml><?xml version="1.0" encoding="utf-8"?>
 <p:tagLst xmlns:a="http://schemas.openxmlformats.org/drawingml/2006/main" xmlns:r="http://schemas.openxmlformats.org/officeDocument/2006/relationships" xmlns:p="http://schemas.openxmlformats.org/presentationml/2006/main">
-  <p:tag name="SLIDO_TYPE" val="SlidoPoll"/>
-  <p:tag name="SLIDO_POLL_UUID" val="4ff5581b-a4a3-4098-829f-4a658c2af325"/>
-  <p:tag name="SLIDO_TIMELINE" val="W3sicG9sbFF1ZXN0aW9uVXVpZCI6ImIzNzBjYjU3LWFiMTAtNDkyMC1hNjMyLTAzNTQ0YzAxMWJmNSIsInNob3dSZXN1bHRzIjpmYWxzZX0seyJwb2xsUXVlc3Rpb25VdWlkIjoiYjM3MGNiNTctYWIxMC00OTIwLWE2MzItMDM1NDRjMDExYmY1Iiwic2hvd1Jlc3VsdHMiOnRydWV9XQ=="/>
+  <p:tag name="SLIDO_ELEMENT" val="footer"/>
 </p:tagLst>
 </file>
 
 <file path=ppt/tags/tag6.xml><?xml version="1.0" encoding="utf-8"?>
+<p:tagLst xmlns:a="http://schemas.openxmlformats.org/drawingml/2006/main" xmlns:r="http://schemas.openxmlformats.org/officeDocument/2006/relationships" xmlns:p="http://schemas.openxmlformats.org/presentationml/2006/main">
+  <p:tag name="SLIDO_ELEMENT" val="corner"/>
+</p:tagLst>
+</file>
+
+<file path=ppt/tags/tag7.xml><?xml version="1.0" encoding="utf-8"?>
+<p:tagLst xmlns:a="http://schemas.openxmlformats.org/drawingml/2006/main" xmlns:r="http://schemas.openxmlformats.org/officeDocument/2006/relationships" xmlns:p="http://schemas.openxmlformats.org/presentationml/2006/main">
+  <p:tag name="SLIDO_TYPE" val="SlidoPoll"/>
+  <p:tag name="SLIDO_POLL_UUID" val="33081d40-273b-4197-9408-a1cfc7b40f7e"/>
+  <p:tag name="SLIDO_TIMELINE" val="W3sicG9sbFF1ZXN0aW9uVXVpZCI6IjEyYjk4YmQ5LTI4MjAtNGQyZS04YmM5LWVkODhhZWVhZmFlNSIsInNob3dSZXN1bHRzIjpmYWxzZX0seyJwb2xsUXVlc3Rpb25VdWlkIjoiMTJiOThiZDktMjgyMC00ZDJlLThiYzktZWQ4OGFlZWFmYWU1Iiwic2hvd1Jlc3VsdHMiOnRydWV9XQ=="/>
+</p:tagLst>
+</file>
+
+<file path=ppt/tags/tag8.xml><?xml version="1.0" encoding="utf-8"?>
 <p:tagLst xmlns:a="http://schemas.openxmlformats.org/drawingml/2006/main" xmlns:r="http://schemas.openxmlformats.org/officeDocument/2006/relationships" xmlns:p="http://schemas.openxmlformats.org/presentationml/2006/main">
   <p:tag name="SLIDO_ELEMENT" val="interaction_image"/>
   <p:tag name="INTERACTION_TYPE" val="MultipleChoice"/>
 </p:tagLst>
 </file>
 
-<file path=ppt/tags/tag7.xml><?xml version="1.0" encoding="utf-8"?>
+<file path=ppt/tags/tag9.xml><?xml version="1.0" encoding="utf-8"?>
 <p:tagLst xmlns:a="http://schemas.openxmlformats.org/drawingml/2006/main" xmlns:r="http://schemas.openxmlformats.org/officeDocument/2006/relationships" xmlns:p="http://schemas.openxmlformats.org/presentationml/2006/main">
   <p:tag name="SLIDO_ELEMENT" val="title"/>
 </p:tagLst>

--- a/Lectures/10-model-selection-and-validation-part-1.pptx
+++ b/Lectures/10-model-selection-and-validation-part-1.pptx
@@ -13778,7 +13778,12 @@
             <p:ph type="title"/>
           </p:nvPr>
         </p:nvSpPr>
-        <p:spPr/>
+        <p:spPr>
+          <a:xfrm>
+            <a:off x="430590" y="86563"/>
+            <a:ext cx="11360700" cy="763500"/>
+          </a:xfrm>
+        </p:spPr>
         <p:txBody>
           <a:bodyPr/>
           <a:lstStyle/>
